--- a/examples/repositories/cyberppt/deck.pptx
+++ b/examples/repositories/cyberppt/deck.pptx
@@ -194,9 +194,9 @@
             </a:lvl1pPr>
           </a:lstStyle>
           <a:p>
-            <a:fld id="{F854CDB6-39E7-472C-8F74-AF9A5A5C9299}" type="datetimeFigureOut">
+            <a:fld id="{58CBAEC8-3AE7-4A21-92A5-9CD69E3C7D79}" type="datetimeFigureOut">
               <a:rPr kumimoji="1" lang="ja-JP" altLang="en-US" smtClean="0"/>
-              <a:t>2026/10/14</a:t>
+              <a:t>2026/10/16</a:t>
             </a:fld>
             <a:endParaRPr kumimoji="1" lang="ja-JP" altLang="en-US"/>
           </a:p>
@@ -384,7 +384,7 @@
             </a:lvl1pPr>
           </a:lstStyle>
           <a:p>
-            <a:fld id="{C2D0E0C2-5493-4280-8AB8-7BB20C59345D}" type="slidenum">
+            <a:fld id="{6C0F699A-B8DA-4E1A-824E-B395315D666C}" type="slidenum">
               <a:rPr kumimoji="1" lang="ja-JP" altLang="en-US" smtClean="0"/>
               <a:t>‹#›</a:t>
             </a:fld>
@@ -395,7 +395,7 @@
     </p:spTree>
     <p:extLst>
       <p:ext uri="{BB962C8B-B14F-4D97-AF65-F5344CB8AC3E}">
-        <p14:creationId xmlns:p14="http://schemas.microsoft.com/office/powerpoint/2010/main" val="1850462942"/>
+        <p14:creationId xmlns:p14="http://schemas.microsoft.com/office/powerpoint/2010/main" val="2877740346"/>
       </p:ext>
     </p:extLst>
   </p:cSld>
@@ -572,7 +572,7 @@
     </p:spTree>
     <p:extLst>
       <p:ext uri="{BB962C8B-B14F-4D97-AF65-F5344CB8AC3E}">
-        <p14:creationId xmlns:p14="http://schemas.microsoft.com/office/powerpoint/2010/main" val="2751643434"/>
+        <p14:creationId xmlns:p14="http://schemas.microsoft.com/office/powerpoint/2010/main" val="3245572224"/>
       </p:ext>
     </p:extLst>
   </p:cSld>
@@ -659,7 +659,7 @@
     </p:spTree>
     <p:extLst>
       <p:ext uri="{BB962C8B-B14F-4D97-AF65-F5344CB8AC3E}">
-        <p14:creationId xmlns:p14="http://schemas.microsoft.com/office/powerpoint/2010/main" val="492038772"/>
+        <p14:creationId xmlns:p14="http://schemas.microsoft.com/office/powerpoint/2010/main" val="3541185865"/>
       </p:ext>
     </p:extLst>
   </p:cSld>
@@ -746,7 +746,7 @@
     </p:spTree>
     <p:extLst>
       <p:ext uri="{BB962C8B-B14F-4D97-AF65-F5344CB8AC3E}">
-        <p14:creationId xmlns:p14="http://schemas.microsoft.com/office/powerpoint/2010/main" val="2758464929"/>
+        <p14:creationId xmlns:p14="http://schemas.microsoft.com/office/powerpoint/2010/main" val="56287591"/>
       </p:ext>
     </p:extLst>
   </p:cSld>
@@ -833,7 +833,7 @@
     </p:spTree>
     <p:extLst>
       <p:ext uri="{BB962C8B-B14F-4D97-AF65-F5344CB8AC3E}">
-        <p14:creationId xmlns:p14="http://schemas.microsoft.com/office/powerpoint/2010/main" val="2482201302"/>
+        <p14:creationId xmlns:p14="http://schemas.microsoft.com/office/powerpoint/2010/main" val="1958658369"/>
       </p:ext>
     </p:extLst>
   </p:cSld>
@@ -920,7 +920,7 @@
     </p:spTree>
     <p:extLst>
       <p:ext uri="{BB962C8B-B14F-4D97-AF65-F5344CB8AC3E}">
-        <p14:creationId xmlns:p14="http://schemas.microsoft.com/office/powerpoint/2010/main" val="2525933957"/>
+        <p14:creationId xmlns:p14="http://schemas.microsoft.com/office/powerpoint/2010/main" val="107083361"/>
       </p:ext>
     </p:extLst>
   </p:cSld>
@@ -952,7 +952,7 @@
           <p:cNvPr id="2" name="タイトル 1">
             <a:extLst>
               <a:ext uri="{FF2B5EF4-FFF2-40B4-BE49-F238E27FC236}">
-                <a16:creationId xmlns:a16="http://schemas.microsoft.com/office/drawing/2014/main" id="{00F85045-30DC-F683-F9AC-D845A46FF526}"/>
+                <a16:creationId xmlns:a16="http://schemas.microsoft.com/office/drawing/2014/main" id="{FEB1EC68-E3CA-AA7E-BC35-2D5F60AC9033}"/>
               </a:ext>
             </a:extLst>
           </p:cNvPr>
@@ -989,7 +989,7 @@
           <p:cNvPr id="3" name="字幕 2">
             <a:extLst>
               <a:ext uri="{FF2B5EF4-FFF2-40B4-BE49-F238E27FC236}">
-                <a16:creationId xmlns:a16="http://schemas.microsoft.com/office/drawing/2014/main" id="{33F75B51-8104-55B8-D1FF-5211211FFABB}"/>
+                <a16:creationId xmlns:a16="http://schemas.microsoft.com/office/drawing/2014/main" id="{AA973CAC-684F-225C-5E67-8326A1F70791}"/>
               </a:ext>
             </a:extLst>
           </p:cNvPr>
@@ -1059,7 +1059,7 @@
           <p:cNvPr id="4" name="日付プレースホルダー 3">
             <a:extLst>
               <a:ext uri="{FF2B5EF4-FFF2-40B4-BE49-F238E27FC236}">
-                <a16:creationId xmlns:a16="http://schemas.microsoft.com/office/drawing/2014/main" id="{E83D2298-0215-27AD-086A-EE9ECDCBBD22}"/>
+                <a16:creationId xmlns:a16="http://schemas.microsoft.com/office/drawing/2014/main" id="{856ECFE8-0186-6EB9-F287-75FEFC1DC517}"/>
               </a:ext>
             </a:extLst>
           </p:cNvPr>
@@ -1075,9 +1075,9 @@
           <a:bodyPr/>
           <a:lstStyle/>
           <a:p>
-            <a:fld id="{B7956192-CA62-4F8B-A14C-F1B97D6B4FED}" type="datetimeFigureOut">
+            <a:fld id="{9F453FE7-A201-44A5-BB2E-86321C77CA51}" type="datetimeFigureOut">
               <a:rPr kumimoji="1" lang="ja-JP" altLang="en-US" smtClean="0"/>
-              <a:t>2026/10/14</a:t>
+              <a:t>2026/10/16</a:t>
             </a:fld>
             <a:endParaRPr kumimoji="1" lang="ja-JP" altLang="en-US"/>
           </a:p>
@@ -1088,7 +1088,7 @@
           <p:cNvPr id="5" name="フッター プレースホルダー 4">
             <a:extLst>
               <a:ext uri="{FF2B5EF4-FFF2-40B4-BE49-F238E27FC236}">
-                <a16:creationId xmlns:a16="http://schemas.microsoft.com/office/drawing/2014/main" id="{096BD33B-288E-34B0-24AA-DF6E28463B07}"/>
+                <a16:creationId xmlns:a16="http://schemas.microsoft.com/office/drawing/2014/main" id="{C12A1A40-0775-BD75-ECEE-4D828E38851A}"/>
               </a:ext>
             </a:extLst>
           </p:cNvPr>
@@ -1113,7 +1113,7 @@
           <p:cNvPr id="6" name="スライド番号プレースホルダー 5">
             <a:extLst>
               <a:ext uri="{FF2B5EF4-FFF2-40B4-BE49-F238E27FC236}">
-                <a16:creationId xmlns:a16="http://schemas.microsoft.com/office/drawing/2014/main" id="{425F0628-502E-760E-5787-33A5440BECAF}"/>
+                <a16:creationId xmlns:a16="http://schemas.microsoft.com/office/drawing/2014/main" id="{CCE01EED-9D31-58D8-E5BF-B02AEB60EB42}"/>
               </a:ext>
             </a:extLst>
           </p:cNvPr>
@@ -1129,7 +1129,7 @@
           <a:bodyPr/>
           <a:lstStyle/>
           <a:p>
-            <a:fld id="{99276E81-FAC9-485E-B9A7-EC3FC9C9DD5D}" type="slidenum">
+            <a:fld id="{E176E3A4-3CBB-4087-8AE5-6CCF17665B68}" type="slidenum">
               <a:rPr kumimoji="1" lang="ja-JP" altLang="en-US" smtClean="0"/>
               <a:t>‹#›</a:t>
             </a:fld>
@@ -1140,7 +1140,7 @@
     </p:spTree>
     <p:extLst>
       <p:ext uri="{BB962C8B-B14F-4D97-AF65-F5344CB8AC3E}">
-        <p14:creationId xmlns:p14="http://schemas.microsoft.com/office/powerpoint/2010/main" val="216793093"/>
+        <p14:creationId xmlns:p14="http://schemas.microsoft.com/office/powerpoint/2010/main" val="973365148"/>
       </p:ext>
     </p:extLst>
   </p:cSld>
@@ -1172,7 +1172,7 @@
           <p:cNvPr id="2" name="タイトル 1">
             <a:extLst>
               <a:ext uri="{FF2B5EF4-FFF2-40B4-BE49-F238E27FC236}">
-                <a16:creationId xmlns:a16="http://schemas.microsoft.com/office/drawing/2014/main" id="{FD06002E-BA32-B754-7461-A02C8B1602B5}"/>
+                <a16:creationId xmlns:a16="http://schemas.microsoft.com/office/drawing/2014/main" id="{8969EC36-6F9E-48F7-C212-1E45B2872063}"/>
               </a:ext>
             </a:extLst>
           </p:cNvPr>
@@ -1200,7 +1200,7 @@
           <p:cNvPr id="3" name="縦書きテキスト プレースホルダー 2">
             <a:extLst>
               <a:ext uri="{FF2B5EF4-FFF2-40B4-BE49-F238E27FC236}">
-                <a16:creationId xmlns:a16="http://schemas.microsoft.com/office/drawing/2014/main" id="{E8DA3DD5-2DCE-0250-7071-5399F3C78A94}"/>
+                <a16:creationId xmlns:a16="http://schemas.microsoft.com/office/drawing/2014/main" id="{90462D48-52AF-3F50-3EBB-62854ABB8877}"/>
               </a:ext>
             </a:extLst>
           </p:cNvPr>
@@ -1289,7 +1289,7 @@
           <p:cNvPr id="4" name="日付プレースホルダー 3">
             <a:extLst>
               <a:ext uri="{FF2B5EF4-FFF2-40B4-BE49-F238E27FC236}">
-                <a16:creationId xmlns:a16="http://schemas.microsoft.com/office/drawing/2014/main" id="{777312F5-4E7A-EAFA-999F-6122E0ED3C86}"/>
+                <a16:creationId xmlns:a16="http://schemas.microsoft.com/office/drawing/2014/main" id="{9E49509F-29C7-0A9A-0F6A-57ED45B61763}"/>
               </a:ext>
             </a:extLst>
           </p:cNvPr>
@@ -1305,9 +1305,9 @@
           <a:bodyPr/>
           <a:lstStyle/>
           <a:p>
-            <a:fld id="{B7956192-CA62-4F8B-A14C-F1B97D6B4FED}" type="datetimeFigureOut">
+            <a:fld id="{9F453FE7-A201-44A5-BB2E-86321C77CA51}" type="datetimeFigureOut">
               <a:rPr kumimoji="1" lang="ja-JP" altLang="en-US" smtClean="0"/>
-              <a:t>2026/10/14</a:t>
+              <a:t>2026/10/16</a:t>
             </a:fld>
             <a:endParaRPr kumimoji="1" lang="ja-JP" altLang="en-US"/>
           </a:p>
@@ -1318,7 +1318,7 @@
           <p:cNvPr id="5" name="フッター プレースホルダー 4">
             <a:extLst>
               <a:ext uri="{FF2B5EF4-FFF2-40B4-BE49-F238E27FC236}">
-                <a16:creationId xmlns:a16="http://schemas.microsoft.com/office/drawing/2014/main" id="{ADEF5034-53A1-80D1-0B31-4E7D691F6D3E}"/>
+                <a16:creationId xmlns:a16="http://schemas.microsoft.com/office/drawing/2014/main" id="{8725C907-2535-1D0E-2B88-122BDCE84134}"/>
               </a:ext>
             </a:extLst>
           </p:cNvPr>
@@ -1343,7 +1343,7 @@
           <p:cNvPr id="6" name="スライド番号プレースホルダー 5">
             <a:extLst>
               <a:ext uri="{FF2B5EF4-FFF2-40B4-BE49-F238E27FC236}">
-                <a16:creationId xmlns:a16="http://schemas.microsoft.com/office/drawing/2014/main" id="{68A45911-D34C-7B26-DF6E-36ED0AE235F5}"/>
+                <a16:creationId xmlns:a16="http://schemas.microsoft.com/office/drawing/2014/main" id="{FAE5F849-E42B-3783-4F33-EC80549D6880}"/>
               </a:ext>
             </a:extLst>
           </p:cNvPr>
@@ -1359,7 +1359,7 @@
           <a:bodyPr/>
           <a:lstStyle/>
           <a:p>
-            <a:fld id="{99276E81-FAC9-485E-B9A7-EC3FC9C9DD5D}" type="slidenum">
+            <a:fld id="{E176E3A4-3CBB-4087-8AE5-6CCF17665B68}" type="slidenum">
               <a:rPr kumimoji="1" lang="ja-JP" altLang="en-US" smtClean="0"/>
               <a:t>‹#›</a:t>
             </a:fld>
@@ -1370,7 +1370,7 @@
     </p:spTree>
     <p:extLst>
       <p:ext uri="{BB962C8B-B14F-4D97-AF65-F5344CB8AC3E}">
-        <p14:creationId xmlns:p14="http://schemas.microsoft.com/office/powerpoint/2010/main" val="124749674"/>
+        <p14:creationId xmlns:p14="http://schemas.microsoft.com/office/powerpoint/2010/main" val="112794114"/>
       </p:ext>
     </p:extLst>
   </p:cSld>
@@ -1402,7 +1402,7 @@
           <p:cNvPr id="2" name="縦書きタイトル 1">
             <a:extLst>
               <a:ext uri="{FF2B5EF4-FFF2-40B4-BE49-F238E27FC236}">
-                <a16:creationId xmlns:a16="http://schemas.microsoft.com/office/drawing/2014/main" id="{C1552998-8591-05BD-BCFD-78CC5A873163}"/>
+                <a16:creationId xmlns:a16="http://schemas.microsoft.com/office/drawing/2014/main" id="{6708C6EF-DBA1-746C-AA74-FC0943D9AD2A}"/>
               </a:ext>
             </a:extLst>
           </p:cNvPr>
@@ -1435,7 +1435,7 @@
           <p:cNvPr id="3" name="縦書きテキスト プレースホルダー 2">
             <a:extLst>
               <a:ext uri="{FF2B5EF4-FFF2-40B4-BE49-F238E27FC236}">
-                <a16:creationId xmlns:a16="http://schemas.microsoft.com/office/drawing/2014/main" id="{483C84E9-E2F2-9F9E-5CAA-97B903873879}"/>
+                <a16:creationId xmlns:a16="http://schemas.microsoft.com/office/drawing/2014/main" id="{775C2208-7716-9CD3-92B5-F4273335F6E1}"/>
               </a:ext>
             </a:extLst>
           </p:cNvPr>
@@ -1529,7 +1529,7 @@
           <p:cNvPr id="4" name="日付プレースホルダー 3">
             <a:extLst>
               <a:ext uri="{FF2B5EF4-FFF2-40B4-BE49-F238E27FC236}">
-                <a16:creationId xmlns:a16="http://schemas.microsoft.com/office/drawing/2014/main" id="{9ECFC213-5820-9D3D-2BA5-009301E0D40B}"/>
+                <a16:creationId xmlns:a16="http://schemas.microsoft.com/office/drawing/2014/main" id="{9267F523-6EA8-E313-22F5-4DE08A973545}"/>
               </a:ext>
             </a:extLst>
           </p:cNvPr>
@@ -1545,9 +1545,9 @@
           <a:bodyPr/>
           <a:lstStyle/>
           <a:p>
-            <a:fld id="{B7956192-CA62-4F8B-A14C-F1B97D6B4FED}" type="datetimeFigureOut">
+            <a:fld id="{9F453FE7-A201-44A5-BB2E-86321C77CA51}" type="datetimeFigureOut">
               <a:rPr kumimoji="1" lang="ja-JP" altLang="en-US" smtClean="0"/>
-              <a:t>2026/10/14</a:t>
+              <a:t>2026/10/16</a:t>
             </a:fld>
             <a:endParaRPr kumimoji="1" lang="ja-JP" altLang="en-US"/>
           </a:p>
@@ -1558,7 +1558,7 @@
           <p:cNvPr id="5" name="フッター プレースホルダー 4">
             <a:extLst>
               <a:ext uri="{FF2B5EF4-FFF2-40B4-BE49-F238E27FC236}">
-                <a16:creationId xmlns:a16="http://schemas.microsoft.com/office/drawing/2014/main" id="{3470008A-A10E-B3C7-AF1F-08AD501C69A4}"/>
+                <a16:creationId xmlns:a16="http://schemas.microsoft.com/office/drawing/2014/main" id="{29DE0A8F-275F-D900-7E62-D90C15CA7CF2}"/>
               </a:ext>
             </a:extLst>
           </p:cNvPr>
@@ -1583,7 +1583,7 @@
           <p:cNvPr id="6" name="スライド番号プレースホルダー 5">
             <a:extLst>
               <a:ext uri="{FF2B5EF4-FFF2-40B4-BE49-F238E27FC236}">
-                <a16:creationId xmlns:a16="http://schemas.microsoft.com/office/drawing/2014/main" id="{10D93158-AD11-B2F7-A56B-CCD0D84B0E47}"/>
+                <a16:creationId xmlns:a16="http://schemas.microsoft.com/office/drawing/2014/main" id="{D36F81F4-007E-E749-9B83-181EE3F7F029}"/>
               </a:ext>
             </a:extLst>
           </p:cNvPr>
@@ -1599,7 +1599,7 @@
           <a:bodyPr/>
           <a:lstStyle/>
           <a:p>
-            <a:fld id="{99276E81-FAC9-485E-B9A7-EC3FC9C9DD5D}" type="slidenum">
+            <a:fld id="{E176E3A4-3CBB-4087-8AE5-6CCF17665B68}" type="slidenum">
               <a:rPr kumimoji="1" lang="ja-JP" altLang="en-US" smtClean="0"/>
               <a:t>‹#›</a:t>
             </a:fld>
@@ -1610,7 +1610,7 @@
     </p:spTree>
     <p:extLst>
       <p:ext uri="{BB962C8B-B14F-4D97-AF65-F5344CB8AC3E}">
-        <p14:creationId xmlns:p14="http://schemas.microsoft.com/office/powerpoint/2010/main" val="4222595269"/>
+        <p14:creationId xmlns:p14="http://schemas.microsoft.com/office/powerpoint/2010/main" val="2765659999"/>
       </p:ext>
     </p:extLst>
   </p:cSld>
@@ -1645,7 +1645,7 @@
     </p:spTree>
     <p:extLst>
       <p:ext uri="{BB962C8B-B14F-4D97-AF65-F5344CB8AC3E}">
-        <p14:creationId xmlns:p14="http://schemas.microsoft.com/office/powerpoint/2010/main" val="321772719"/>
+        <p14:creationId xmlns:p14="http://schemas.microsoft.com/office/powerpoint/2010/main" val="4211502695"/>
       </p:ext>
     </p:extLst>
   </p:cSld>
@@ -1677,7 +1677,7 @@
           <p:cNvPr id="2" name="タイトル 1">
             <a:extLst>
               <a:ext uri="{FF2B5EF4-FFF2-40B4-BE49-F238E27FC236}">
-                <a16:creationId xmlns:a16="http://schemas.microsoft.com/office/drawing/2014/main" id="{03C5DF60-390D-3BE7-00F4-993E0F1E54A4}"/>
+                <a16:creationId xmlns:a16="http://schemas.microsoft.com/office/drawing/2014/main" id="{AA57895D-9498-B561-56E2-AA723434C4B4}"/>
               </a:ext>
             </a:extLst>
           </p:cNvPr>
@@ -1705,7 +1705,7 @@
           <p:cNvPr id="3" name="コンテンツ プレースホルダー 2">
             <a:extLst>
               <a:ext uri="{FF2B5EF4-FFF2-40B4-BE49-F238E27FC236}">
-                <a16:creationId xmlns:a16="http://schemas.microsoft.com/office/drawing/2014/main" id="{5420DA09-CB94-C1B6-4705-9B3FAAC30548}"/>
+                <a16:creationId xmlns:a16="http://schemas.microsoft.com/office/drawing/2014/main" id="{3E93E52D-C5DE-72F9-2914-6C863E8B80F8}"/>
               </a:ext>
             </a:extLst>
           </p:cNvPr>
@@ -1794,7 +1794,7 @@
           <p:cNvPr id="4" name="日付プレースホルダー 3">
             <a:extLst>
               <a:ext uri="{FF2B5EF4-FFF2-40B4-BE49-F238E27FC236}">
-                <a16:creationId xmlns:a16="http://schemas.microsoft.com/office/drawing/2014/main" id="{F52F4536-5AB9-49CC-BD67-D4793D53C7C3}"/>
+                <a16:creationId xmlns:a16="http://schemas.microsoft.com/office/drawing/2014/main" id="{9A8295DD-1288-DA5A-E4FD-0FF385302412}"/>
               </a:ext>
             </a:extLst>
           </p:cNvPr>
@@ -1810,9 +1810,9 @@
           <a:bodyPr/>
           <a:lstStyle/>
           <a:p>
-            <a:fld id="{B7956192-CA62-4F8B-A14C-F1B97D6B4FED}" type="datetimeFigureOut">
+            <a:fld id="{9F453FE7-A201-44A5-BB2E-86321C77CA51}" type="datetimeFigureOut">
               <a:rPr kumimoji="1" lang="ja-JP" altLang="en-US" smtClean="0"/>
-              <a:t>2026/10/14</a:t>
+              <a:t>2026/10/16</a:t>
             </a:fld>
             <a:endParaRPr kumimoji="1" lang="ja-JP" altLang="en-US"/>
           </a:p>
@@ -1823,7 +1823,7 @@
           <p:cNvPr id="5" name="フッター プレースホルダー 4">
             <a:extLst>
               <a:ext uri="{FF2B5EF4-FFF2-40B4-BE49-F238E27FC236}">
-                <a16:creationId xmlns:a16="http://schemas.microsoft.com/office/drawing/2014/main" id="{0C727F12-A29F-B6B2-A762-DD85163BC551}"/>
+                <a16:creationId xmlns:a16="http://schemas.microsoft.com/office/drawing/2014/main" id="{D8E4AE42-E68E-A24D-C175-4A6B4CFDF3B6}"/>
               </a:ext>
             </a:extLst>
           </p:cNvPr>
@@ -1848,7 +1848,7 @@
           <p:cNvPr id="6" name="スライド番号プレースホルダー 5">
             <a:extLst>
               <a:ext uri="{FF2B5EF4-FFF2-40B4-BE49-F238E27FC236}">
-                <a16:creationId xmlns:a16="http://schemas.microsoft.com/office/drawing/2014/main" id="{465B00B8-5136-10A6-7A41-78D0EF57CA92}"/>
+                <a16:creationId xmlns:a16="http://schemas.microsoft.com/office/drawing/2014/main" id="{E0332841-AF7B-046C-EF8B-FAFB9D9C757B}"/>
               </a:ext>
             </a:extLst>
           </p:cNvPr>
@@ -1864,7 +1864,7 @@
           <a:bodyPr/>
           <a:lstStyle/>
           <a:p>
-            <a:fld id="{99276E81-FAC9-485E-B9A7-EC3FC9C9DD5D}" type="slidenum">
+            <a:fld id="{E176E3A4-3CBB-4087-8AE5-6CCF17665B68}" type="slidenum">
               <a:rPr kumimoji="1" lang="ja-JP" altLang="en-US" smtClean="0"/>
               <a:t>‹#›</a:t>
             </a:fld>
@@ -1875,7 +1875,7 @@
     </p:spTree>
     <p:extLst>
       <p:ext uri="{BB962C8B-B14F-4D97-AF65-F5344CB8AC3E}">
-        <p14:creationId xmlns:p14="http://schemas.microsoft.com/office/powerpoint/2010/main" val="922746001"/>
+        <p14:creationId xmlns:p14="http://schemas.microsoft.com/office/powerpoint/2010/main" val="1898202522"/>
       </p:ext>
     </p:extLst>
   </p:cSld>
@@ -1907,7 +1907,7 @@
           <p:cNvPr id="2" name="タイトル 1">
             <a:extLst>
               <a:ext uri="{FF2B5EF4-FFF2-40B4-BE49-F238E27FC236}">
-                <a16:creationId xmlns:a16="http://schemas.microsoft.com/office/drawing/2014/main" id="{0693549A-D86D-3785-47A7-271122E54692}"/>
+                <a16:creationId xmlns:a16="http://schemas.microsoft.com/office/drawing/2014/main" id="{1ED403BC-99F6-57DE-CF14-9A985FAEE791}"/>
               </a:ext>
             </a:extLst>
           </p:cNvPr>
@@ -1944,7 +1944,7 @@
           <p:cNvPr id="3" name="テキスト プレースホルダー 2">
             <a:extLst>
               <a:ext uri="{FF2B5EF4-FFF2-40B4-BE49-F238E27FC236}">
-                <a16:creationId xmlns:a16="http://schemas.microsoft.com/office/drawing/2014/main" id="{F44C0741-5003-F2AF-F876-0D3E4F6770C8}"/>
+                <a16:creationId xmlns:a16="http://schemas.microsoft.com/office/drawing/2014/main" id="{3E07F674-4A50-2357-15B1-C4972AB0CD02}"/>
               </a:ext>
             </a:extLst>
           </p:cNvPr>
@@ -2069,7 +2069,7 @@
           <p:cNvPr id="4" name="日付プレースホルダー 3">
             <a:extLst>
               <a:ext uri="{FF2B5EF4-FFF2-40B4-BE49-F238E27FC236}">
-                <a16:creationId xmlns:a16="http://schemas.microsoft.com/office/drawing/2014/main" id="{35F89529-31C7-AA9A-17DD-D35B934F39EF}"/>
+                <a16:creationId xmlns:a16="http://schemas.microsoft.com/office/drawing/2014/main" id="{A166CB3F-49B3-C45A-46AE-E52336D144CC}"/>
               </a:ext>
             </a:extLst>
           </p:cNvPr>
@@ -2085,9 +2085,9 @@
           <a:bodyPr/>
           <a:lstStyle/>
           <a:p>
-            <a:fld id="{B7956192-CA62-4F8B-A14C-F1B97D6B4FED}" type="datetimeFigureOut">
+            <a:fld id="{9F453FE7-A201-44A5-BB2E-86321C77CA51}" type="datetimeFigureOut">
               <a:rPr kumimoji="1" lang="ja-JP" altLang="en-US" smtClean="0"/>
-              <a:t>2026/10/14</a:t>
+              <a:t>2026/10/16</a:t>
             </a:fld>
             <a:endParaRPr kumimoji="1" lang="ja-JP" altLang="en-US"/>
           </a:p>
@@ -2098,7 +2098,7 @@
           <p:cNvPr id="5" name="フッター プレースホルダー 4">
             <a:extLst>
               <a:ext uri="{FF2B5EF4-FFF2-40B4-BE49-F238E27FC236}">
-                <a16:creationId xmlns:a16="http://schemas.microsoft.com/office/drawing/2014/main" id="{F068D382-3061-7840-093B-245B9DFEEC89}"/>
+                <a16:creationId xmlns:a16="http://schemas.microsoft.com/office/drawing/2014/main" id="{E0EA6FC3-5F7F-72E0-468A-192BD7353A2F}"/>
               </a:ext>
             </a:extLst>
           </p:cNvPr>
@@ -2123,7 +2123,7 @@
           <p:cNvPr id="6" name="スライド番号プレースホルダー 5">
             <a:extLst>
               <a:ext uri="{FF2B5EF4-FFF2-40B4-BE49-F238E27FC236}">
-                <a16:creationId xmlns:a16="http://schemas.microsoft.com/office/drawing/2014/main" id="{6D7C5FE2-3273-2F70-912F-AA7A54BA6837}"/>
+                <a16:creationId xmlns:a16="http://schemas.microsoft.com/office/drawing/2014/main" id="{8E72815F-6189-7AA3-6EBE-0B87DFFAE28A}"/>
               </a:ext>
             </a:extLst>
           </p:cNvPr>
@@ -2139,7 +2139,7 @@
           <a:bodyPr/>
           <a:lstStyle/>
           <a:p>
-            <a:fld id="{99276E81-FAC9-485E-B9A7-EC3FC9C9DD5D}" type="slidenum">
+            <a:fld id="{E176E3A4-3CBB-4087-8AE5-6CCF17665B68}" type="slidenum">
               <a:rPr kumimoji="1" lang="ja-JP" altLang="en-US" smtClean="0"/>
               <a:t>‹#›</a:t>
             </a:fld>
@@ -2150,7 +2150,7 @@
     </p:spTree>
     <p:extLst>
       <p:ext uri="{BB962C8B-B14F-4D97-AF65-F5344CB8AC3E}">
-        <p14:creationId xmlns:p14="http://schemas.microsoft.com/office/powerpoint/2010/main" val="457072532"/>
+        <p14:creationId xmlns:p14="http://schemas.microsoft.com/office/powerpoint/2010/main" val="824955461"/>
       </p:ext>
     </p:extLst>
   </p:cSld>
@@ -2182,7 +2182,7 @@
           <p:cNvPr id="2" name="タイトル 1">
             <a:extLst>
               <a:ext uri="{FF2B5EF4-FFF2-40B4-BE49-F238E27FC236}">
-                <a16:creationId xmlns:a16="http://schemas.microsoft.com/office/drawing/2014/main" id="{036A8D0A-383B-D3D9-1CC6-7C79311EABCB}"/>
+                <a16:creationId xmlns:a16="http://schemas.microsoft.com/office/drawing/2014/main" id="{0332DA13-284A-562B-2986-78B182D1F7D8}"/>
               </a:ext>
             </a:extLst>
           </p:cNvPr>
@@ -2210,7 +2210,7 @@
           <p:cNvPr id="3" name="コンテンツ プレースホルダー 2">
             <a:extLst>
               <a:ext uri="{FF2B5EF4-FFF2-40B4-BE49-F238E27FC236}">
-                <a16:creationId xmlns:a16="http://schemas.microsoft.com/office/drawing/2014/main" id="{59F8E111-280F-98E2-6414-DCE70D271A73}"/>
+                <a16:creationId xmlns:a16="http://schemas.microsoft.com/office/drawing/2014/main" id="{DCDEA653-1ED8-813B-57D5-72139EC87850}"/>
               </a:ext>
             </a:extLst>
           </p:cNvPr>
@@ -2304,7 +2304,7 @@
           <p:cNvPr id="4" name="コンテンツ プレースホルダー 3">
             <a:extLst>
               <a:ext uri="{FF2B5EF4-FFF2-40B4-BE49-F238E27FC236}">
-                <a16:creationId xmlns:a16="http://schemas.microsoft.com/office/drawing/2014/main" id="{1440B80E-D9D3-F262-FD99-412E633454CB}"/>
+                <a16:creationId xmlns:a16="http://schemas.microsoft.com/office/drawing/2014/main" id="{0A4EEF66-4DEC-5C7F-49DB-73CC409B5B54}"/>
               </a:ext>
             </a:extLst>
           </p:cNvPr>
@@ -2398,7 +2398,7 @@
           <p:cNvPr id="5" name="日付プレースホルダー 4">
             <a:extLst>
               <a:ext uri="{FF2B5EF4-FFF2-40B4-BE49-F238E27FC236}">
-                <a16:creationId xmlns:a16="http://schemas.microsoft.com/office/drawing/2014/main" id="{885B6741-6A15-A8C5-14B1-A5B4AACA9D23}"/>
+                <a16:creationId xmlns:a16="http://schemas.microsoft.com/office/drawing/2014/main" id="{20DDF6C6-C380-18A7-F163-473FC8221B84}"/>
               </a:ext>
             </a:extLst>
           </p:cNvPr>
@@ -2414,9 +2414,9 @@
           <a:bodyPr/>
           <a:lstStyle/>
           <a:p>
-            <a:fld id="{B7956192-CA62-4F8B-A14C-F1B97D6B4FED}" type="datetimeFigureOut">
+            <a:fld id="{9F453FE7-A201-44A5-BB2E-86321C77CA51}" type="datetimeFigureOut">
               <a:rPr kumimoji="1" lang="ja-JP" altLang="en-US" smtClean="0"/>
-              <a:t>2026/10/14</a:t>
+              <a:t>2026/10/16</a:t>
             </a:fld>
             <a:endParaRPr kumimoji="1" lang="ja-JP" altLang="en-US"/>
           </a:p>
@@ -2427,7 +2427,7 @@
           <p:cNvPr id="6" name="フッター プレースホルダー 5">
             <a:extLst>
               <a:ext uri="{FF2B5EF4-FFF2-40B4-BE49-F238E27FC236}">
-                <a16:creationId xmlns:a16="http://schemas.microsoft.com/office/drawing/2014/main" id="{5068BD66-1F0A-D3DC-1E0E-4E75119C99EB}"/>
+                <a16:creationId xmlns:a16="http://schemas.microsoft.com/office/drawing/2014/main" id="{568F1316-4891-11A2-958D-588A4C2B6592}"/>
               </a:ext>
             </a:extLst>
           </p:cNvPr>
@@ -2452,7 +2452,7 @@
           <p:cNvPr id="7" name="スライド番号プレースホルダー 6">
             <a:extLst>
               <a:ext uri="{FF2B5EF4-FFF2-40B4-BE49-F238E27FC236}">
-                <a16:creationId xmlns:a16="http://schemas.microsoft.com/office/drawing/2014/main" id="{0C84A61B-5872-462E-8C91-68FD48DE99A4}"/>
+                <a16:creationId xmlns:a16="http://schemas.microsoft.com/office/drawing/2014/main" id="{01537BFE-4CE4-625C-2F83-BFF2C7A56928}"/>
               </a:ext>
             </a:extLst>
           </p:cNvPr>
@@ -2468,7 +2468,7 @@
           <a:bodyPr/>
           <a:lstStyle/>
           <a:p>
-            <a:fld id="{99276E81-FAC9-485E-B9A7-EC3FC9C9DD5D}" type="slidenum">
+            <a:fld id="{E176E3A4-3CBB-4087-8AE5-6CCF17665B68}" type="slidenum">
               <a:rPr kumimoji="1" lang="ja-JP" altLang="en-US" smtClean="0"/>
               <a:t>‹#›</a:t>
             </a:fld>
@@ -2479,7 +2479,7 @@
     </p:spTree>
     <p:extLst>
       <p:ext uri="{BB962C8B-B14F-4D97-AF65-F5344CB8AC3E}">
-        <p14:creationId xmlns:p14="http://schemas.microsoft.com/office/powerpoint/2010/main" val="2224260716"/>
+        <p14:creationId xmlns:p14="http://schemas.microsoft.com/office/powerpoint/2010/main" val="3848786129"/>
       </p:ext>
     </p:extLst>
   </p:cSld>
@@ -2511,7 +2511,7 @@
           <p:cNvPr id="2" name="タイトル 1">
             <a:extLst>
               <a:ext uri="{FF2B5EF4-FFF2-40B4-BE49-F238E27FC236}">
-                <a16:creationId xmlns:a16="http://schemas.microsoft.com/office/drawing/2014/main" id="{195F7E21-582D-EEEB-3EC6-A9829EEEA765}"/>
+                <a16:creationId xmlns:a16="http://schemas.microsoft.com/office/drawing/2014/main" id="{5C0057BB-AF10-F0CC-0ACC-765671B60626}"/>
               </a:ext>
             </a:extLst>
           </p:cNvPr>
@@ -2544,7 +2544,7 @@
           <p:cNvPr id="3" name="テキスト プレースホルダー 2">
             <a:extLst>
               <a:ext uri="{FF2B5EF4-FFF2-40B4-BE49-F238E27FC236}">
-                <a16:creationId xmlns:a16="http://schemas.microsoft.com/office/drawing/2014/main" id="{FFE39617-F9A5-4735-0F86-83D7BE96BEB4}"/>
+                <a16:creationId xmlns:a16="http://schemas.microsoft.com/office/drawing/2014/main" id="{1DD40A1C-F435-2E38-28A0-CC5BD67F899E}"/>
               </a:ext>
             </a:extLst>
           </p:cNvPr>
@@ -2615,7 +2615,7 @@
           <p:cNvPr id="4" name="コンテンツ プレースホルダー 3">
             <a:extLst>
               <a:ext uri="{FF2B5EF4-FFF2-40B4-BE49-F238E27FC236}">
-                <a16:creationId xmlns:a16="http://schemas.microsoft.com/office/drawing/2014/main" id="{14A25268-D6C8-DD07-248D-8BA5CD8635D7}"/>
+                <a16:creationId xmlns:a16="http://schemas.microsoft.com/office/drawing/2014/main" id="{E5AC50A2-623F-F0AF-3EA8-D5401C460994}"/>
               </a:ext>
             </a:extLst>
           </p:cNvPr>
@@ -2709,7 +2709,7 @@
           <p:cNvPr id="5" name="テキスト プレースホルダー 4">
             <a:extLst>
               <a:ext uri="{FF2B5EF4-FFF2-40B4-BE49-F238E27FC236}">
-                <a16:creationId xmlns:a16="http://schemas.microsoft.com/office/drawing/2014/main" id="{9C91F4F2-527A-5404-2EB8-6D350E5D51BC}"/>
+                <a16:creationId xmlns:a16="http://schemas.microsoft.com/office/drawing/2014/main" id="{DA0833AD-255F-1FAE-BA76-0D6FC8F7FF81}"/>
               </a:ext>
             </a:extLst>
           </p:cNvPr>
@@ -2780,7 +2780,7 @@
           <p:cNvPr id="6" name="コンテンツ プレースホルダー 5">
             <a:extLst>
               <a:ext uri="{FF2B5EF4-FFF2-40B4-BE49-F238E27FC236}">
-                <a16:creationId xmlns:a16="http://schemas.microsoft.com/office/drawing/2014/main" id="{05AE2161-C28D-1CF1-9EDD-3FED84262B7B}"/>
+                <a16:creationId xmlns:a16="http://schemas.microsoft.com/office/drawing/2014/main" id="{94781330-DB8D-C483-D25A-9416C09C4588}"/>
               </a:ext>
             </a:extLst>
           </p:cNvPr>
@@ -2874,7 +2874,7 @@
           <p:cNvPr id="7" name="日付プレースホルダー 6">
             <a:extLst>
               <a:ext uri="{FF2B5EF4-FFF2-40B4-BE49-F238E27FC236}">
-                <a16:creationId xmlns:a16="http://schemas.microsoft.com/office/drawing/2014/main" id="{FEE52CFC-5C5F-02F6-C7EA-4A853EECFC94}"/>
+                <a16:creationId xmlns:a16="http://schemas.microsoft.com/office/drawing/2014/main" id="{1345150A-6DE6-E263-2F13-964DC4C3EF6E}"/>
               </a:ext>
             </a:extLst>
           </p:cNvPr>
@@ -2890,9 +2890,9 @@
           <a:bodyPr/>
           <a:lstStyle/>
           <a:p>
-            <a:fld id="{B7956192-CA62-4F8B-A14C-F1B97D6B4FED}" type="datetimeFigureOut">
+            <a:fld id="{9F453FE7-A201-44A5-BB2E-86321C77CA51}" type="datetimeFigureOut">
               <a:rPr kumimoji="1" lang="ja-JP" altLang="en-US" smtClean="0"/>
-              <a:t>2026/10/14</a:t>
+              <a:t>2026/10/16</a:t>
             </a:fld>
             <a:endParaRPr kumimoji="1" lang="ja-JP" altLang="en-US"/>
           </a:p>
@@ -2903,7 +2903,7 @@
           <p:cNvPr id="8" name="フッター プレースホルダー 7">
             <a:extLst>
               <a:ext uri="{FF2B5EF4-FFF2-40B4-BE49-F238E27FC236}">
-                <a16:creationId xmlns:a16="http://schemas.microsoft.com/office/drawing/2014/main" id="{755E6405-98EF-F64D-FAA6-B4B809CFCAC8}"/>
+                <a16:creationId xmlns:a16="http://schemas.microsoft.com/office/drawing/2014/main" id="{3975175E-D165-1CA9-666D-AD28F18122C0}"/>
               </a:ext>
             </a:extLst>
           </p:cNvPr>
@@ -2928,7 +2928,7 @@
           <p:cNvPr id="9" name="スライド番号プレースホルダー 8">
             <a:extLst>
               <a:ext uri="{FF2B5EF4-FFF2-40B4-BE49-F238E27FC236}">
-                <a16:creationId xmlns:a16="http://schemas.microsoft.com/office/drawing/2014/main" id="{B6A90FFC-E5A8-AB53-D608-5AB61A64CE53}"/>
+                <a16:creationId xmlns:a16="http://schemas.microsoft.com/office/drawing/2014/main" id="{462EAC6B-D6D3-8450-C8D6-09AE5D332926}"/>
               </a:ext>
             </a:extLst>
           </p:cNvPr>
@@ -2944,7 +2944,7 @@
           <a:bodyPr/>
           <a:lstStyle/>
           <a:p>
-            <a:fld id="{99276E81-FAC9-485E-B9A7-EC3FC9C9DD5D}" type="slidenum">
+            <a:fld id="{E176E3A4-3CBB-4087-8AE5-6CCF17665B68}" type="slidenum">
               <a:rPr kumimoji="1" lang="ja-JP" altLang="en-US" smtClean="0"/>
               <a:t>‹#›</a:t>
             </a:fld>
@@ -2955,7 +2955,7 @@
     </p:spTree>
     <p:extLst>
       <p:ext uri="{BB962C8B-B14F-4D97-AF65-F5344CB8AC3E}">
-        <p14:creationId xmlns:p14="http://schemas.microsoft.com/office/powerpoint/2010/main" val="2658367930"/>
+        <p14:creationId xmlns:p14="http://schemas.microsoft.com/office/powerpoint/2010/main" val="3793068157"/>
       </p:ext>
     </p:extLst>
   </p:cSld>
@@ -2987,7 +2987,7 @@
           <p:cNvPr id="2" name="タイトル 1">
             <a:extLst>
               <a:ext uri="{FF2B5EF4-FFF2-40B4-BE49-F238E27FC236}">
-                <a16:creationId xmlns:a16="http://schemas.microsoft.com/office/drawing/2014/main" id="{C67BD8E6-26CB-CB93-7AC8-4E1DFCF26E6B}"/>
+                <a16:creationId xmlns:a16="http://schemas.microsoft.com/office/drawing/2014/main" id="{591FE85D-6466-6F72-8F08-CA0980540176}"/>
               </a:ext>
             </a:extLst>
           </p:cNvPr>
@@ -3015,7 +3015,7 @@
           <p:cNvPr id="3" name="日付プレースホルダー 2">
             <a:extLst>
               <a:ext uri="{FF2B5EF4-FFF2-40B4-BE49-F238E27FC236}">
-                <a16:creationId xmlns:a16="http://schemas.microsoft.com/office/drawing/2014/main" id="{B998B9A7-9CDC-7F4F-B9BD-CDC2C5C501EE}"/>
+                <a16:creationId xmlns:a16="http://schemas.microsoft.com/office/drawing/2014/main" id="{127BB42F-9D6B-837E-BE07-9200F622FC48}"/>
               </a:ext>
             </a:extLst>
           </p:cNvPr>
@@ -3031,9 +3031,9 @@
           <a:bodyPr/>
           <a:lstStyle/>
           <a:p>
-            <a:fld id="{B7956192-CA62-4F8B-A14C-F1B97D6B4FED}" type="datetimeFigureOut">
+            <a:fld id="{9F453FE7-A201-44A5-BB2E-86321C77CA51}" type="datetimeFigureOut">
               <a:rPr kumimoji="1" lang="ja-JP" altLang="en-US" smtClean="0"/>
-              <a:t>2026/10/14</a:t>
+              <a:t>2026/10/16</a:t>
             </a:fld>
             <a:endParaRPr kumimoji="1" lang="ja-JP" altLang="en-US"/>
           </a:p>
@@ -3044,7 +3044,7 @@
           <p:cNvPr id="4" name="フッター プレースホルダー 3">
             <a:extLst>
               <a:ext uri="{FF2B5EF4-FFF2-40B4-BE49-F238E27FC236}">
-                <a16:creationId xmlns:a16="http://schemas.microsoft.com/office/drawing/2014/main" id="{72CBD4F1-DB04-4750-2985-0D770036CE49}"/>
+                <a16:creationId xmlns:a16="http://schemas.microsoft.com/office/drawing/2014/main" id="{D0B480A1-E10A-991A-6CA6-DD78B979B08F}"/>
               </a:ext>
             </a:extLst>
           </p:cNvPr>
@@ -3069,7 +3069,7 @@
           <p:cNvPr id="5" name="スライド番号プレースホルダー 4">
             <a:extLst>
               <a:ext uri="{FF2B5EF4-FFF2-40B4-BE49-F238E27FC236}">
-                <a16:creationId xmlns:a16="http://schemas.microsoft.com/office/drawing/2014/main" id="{5C306FD4-F287-1D2F-C6AE-C1B3D304896D}"/>
+                <a16:creationId xmlns:a16="http://schemas.microsoft.com/office/drawing/2014/main" id="{CF081E2D-DFF8-240B-8E22-B322E6F6FB09}"/>
               </a:ext>
             </a:extLst>
           </p:cNvPr>
@@ -3085,7 +3085,7 @@
           <a:bodyPr/>
           <a:lstStyle/>
           <a:p>
-            <a:fld id="{99276E81-FAC9-485E-B9A7-EC3FC9C9DD5D}" type="slidenum">
+            <a:fld id="{E176E3A4-3CBB-4087-8AE5-6CCF17665B68}" type="slidenum">
               <a:rPr kumimoji="1" lang="ja-JP" altLang="en-US" smtClean="0"/>
               <a:t>‹#›</a:t>
             </a:fld>
@@ -3096,7 +3096,7 @@
     </p:spTree>
     <p:extLst>
       <p:ext uri="{BB962C8B-B14F-4D97-AF65-F5344CB8AC3E}">
-        <p14:creationId xmlns:p14="http://schemas.microsoft.com/office/powerpoint/2010/main" val="22950216"/>
+        <p14:creationId xmlns:p14="http://schemas.microsoft.com/office/powerpoint/2010/main" val="2339048411"/>
       </p:ext>
     </p:extLst>
   </p:cSld>
@@ -3128,7 +3128,7 @@
           <p:cNvPr id="2" name="日付プレースホルダー 1">
             <a:extLst>
               <a:ext uri="{FF2B5EF4-FFF2-40B4-BE49-F238E27FC236}">
-                <a16:creationId xmlns:a16="http://schemas.microsoft.com/office/drawing/2014/main" id="{9E4D30A8-DBE1-9B5F-FFCA-25FC9A7AFF98}"/>
+                <a16:creationId xmlns:a16="http://schemas.microsoft.com/office/drawing/2014/main" id="{42DAAEB3-9FA5-9F2B-7F6C-F4213E272797}"/>
               </a:ext>
             </a:extLst>
           </p:cNvPr>
@@ -3144,9 +3144,9 @@
           <a:bodyPr/>
           <a:lstStyle/>
           <a:p>
-            <a:fld id="{B7956192-CA62-4F8B-A14C-F1B97D6B4FED}" type="datetimeFigureOut">
+            <a:fld id="{9F453FE7-A201-44A5-BB2E-86321C77CA51}" type="datetimeFigureOut">
               <a:rPr kumimoji="1" lang="ja-JP" altLang="en-US" smtClean="0"/>
-              <a:t>2026/10/14</a:t>
+              <a:t>2026/10/16</a:t>
             </a:fld>
             <a:endParaRPr kumimoji="1" lang="ja-JP" altLang="en-US"/>
           </a:p>
@@ -3157,7 +3157,7 @@
           <p:cNvPr id="3" name="フッター プレースホルダー 2">
             <a:extLst>
               <a:ext uri="{FF2B5EF4-FFF2-40B4-BE49-F238E27FC236}">
-                <a16:creationId xmlns:a16="http://schemas.microsoft.com/office/drawing/2014/main" id="{6F54FDD6-4FE4-35E5-48F3-C4ED4503F8E4}"/>
+                <a16:creationId xmlns:a16="http://schemas.microsoft.com/office/drawing/2014/main" id="{FD535FCF-B5AD-0B14-AE17-B95A7BDC2B29}"/>
               </a:ext>
             </a:extLst>
           </p:cNvPr>
@@ -3182,7 +3182,7 @@
           <p:cNvPr id="4" name="スライド番号プレースホルダー 3">
             <a:extLst>
               <a:ext uri="{FF2B5EF4-FFF2-40B4-BE49-F238E27FC236}">
-                <a16:creationId xmlns:a16="http://schemas.microsoft.com/office/drawing/2014/main" id="{4FC33AA6-6261-DFC1-EFDB-4EFDAC665AC3}"/>
+                <a16:creationId xmlns:a16="http://schemas.microsoft.com/office/drawing/2014/main" id="{7577495A-186E-2E74-7D72-8E05FEFD298B}"/>
               </a:ext>
             </a:extLst>
           </p:cNvPr>
@@ -3198,7 +3198,7 @@
           <a:bodyPr/>
           <a:lstStyle/>
           <a:p>
-            <a:fld id="{99276E81-FAC9-485E-B9A7-EC3FC9C9DD5D}" type="slidenum">
+            <a:fld id="{E176E3A4-3CBB-4087-8AE5-6CCF17665B68}" type="slidenum">
               <a:rPr kumimoji="1" lang="ja-JP" altLang="en-US" smtClean="0"/>
               <a:t>‹#›</a:t>
             </a:fld>
@@ -3209,7 +3209,7 @@
     </p:spTree>
     <p:extLst>
       <p:ext uri="{BB962C8B-B14F-4D97-AF65-F5344CB8AC3E}">
-        <p14:creationId xmlns:p14="http://schemas.microsoft.com/office/powerpoint/2010/main" val="1236865265"/>
+        <p14:creationId xmlns:p14="http://schemas.microsoft.com/office/powerpoint/2010/main" val="963417432"/>
       </p:ext>
     </p:extLst>
   </p:cSld>
@@ -3241,7 +3241,7 @@
           <p:cNvPr id="2" name="タイトル 1">
             <a:extLst>
               <a:ext uri="{FF2B5EF4-FFF2-40B4-BE49-F238E27FC236}">
-                <a16:creationId xmlns:a16="http://schemas.microsoft.com/office/drawing/2014/main" id="{77A43962-5C53-BF7E-83A4-22FF3647C25F}"/>
+                <a16:creationId xmlns:a16="http://schemas.microsoft.com/office/drawing/2014/main" id="{5D745ABB-DDD7-9C6D-E519-DEDE4A506770}"/>
               </a:ext>
             </a:extLst>
           </p:cNvPr>
@@ -3278,7 +3278,7 @@
           <p:cNvPr id="3" name="コンテンツ プレースホルダー 2">
             <a:extLst>
               <a:ext uri="{FF2B5EF4-FFF2-40B4-BE49-F238E27FC236}">
-                <a16:creationId xmlns:a16="http://schemas.microsoft.com/office/drawing/2014/main" id="{66504E77-512A-7F03-CD2B-129CC47CEDD9}"/>
+                <a16:creationId xmlns:a16="http://schemas.microsoft.com/office/drawing/2014/main" id="{5092AA47-E349-384C-B3B3-0D48F5AC4B51}"/>
               </a:ext>
             </a:extLst>
           </p:cNvPr>
@@ -3400,7 +3400,7 @@
           <p:cNvPr id="4" name="テキスト プレースホルダー 3">
             <a:extLst>
               <a:ext uri="{FF2B5EF4-FFF2-40B4-BE49-F238E27FC236}">
-                <a16:creationId xmlns:a16="http://schemas.microsoft.com/office/drawing/2014/main" id="{FE9EC8EE-C0B3-E78E-46DE-061F5171FE9E}"/>
+                <a16:creationId xmlns:a16="http://schemas.microsoft.com/office/drawing/2014/main" id="{A93B441A-ED5F-861B-61D0-7D4E16B2AF79}"/>
               </a:ext>
             </a:extLst>
           </p:cNvPr>
@@ -3471,7 +3471,7 @@
           <p:cNvPr id="5" name="日付プレースホルダー 4">
             <a:extLst>
               <a:ext uri="{FF2B5EF4-FFF2-40B4-BE49-F238E27FC236}">
-                <a16:creationId xmlns:a16="http://schemas.microsoft.com/office/drawing/2014/main" id="{EAD5EC40-BCC6-9071-A7A4-50D92045E8A3}"/>
+                <a16:creationId xmlns:a16="http://schemas.microsoft.com/office/drawing/2014/main" id="{E6B517D1-CCAE-16B6-2D6F-5E8A60377B9C}"/>
               </a:ext>
             </a:extLst>
           </p:cNvPr>
@@ -3487,9 +3487,9 @@
           <a:bodyPr/>
           <a:lstStyle/>
           <a:p>
-            <a:fld id="{B7956192-CA62-4F8B-A14C-F1B97D6B4FED}" type="datetimeFigureOut">
+            <a:fld id="{9F453FE7-A201-44A5-BB2E-86321C77CA51}" type="datetimeFigureOut">
               <a:rPr kumimoji="1" lang="ja-JP" altLang="en-US" smtClean="0"/>
-              <a:t>2026/10/14</a:t>
+              <a:t>2026/10/16</a:t>
             </a:fld>
             <a:endParaRPr kumimoji="1" lang="ja-JP" altLang="en-US"/>
           </a:p>
@@ -3500,7 +3500,7 @@
           <p:cNvPr id="6" name="フッター プレースホルダー 5">
             <a:extLst>
               <a:ext uri="{FF2B5EF4-FFF2-40B4-BE49-F238E27FC236}">
-                <a16:creationId xmlns:a16="http://schemas.microsoft.com/office/drawing/2014/main" id="{CC52BE77-C334-C53D-D0D2-AAFAEB9509FF}"/>
+                <a16:creationId xmlns:a16="http://schemas.microsoft.com/office/drawing/2014/main" id="{B058B1C5-C2E8-E370-F446-7AA6E89D7513}"/>
               </a:ext>
             </a:extLst>
           </p:cNvPr>
@@ -3525,7 +3525,7 @@
           <p:cNvPr id="7" name="スライド番号プレースホルダー 6">
             <a:extLst>
               <a:ext uri="{FF2B5EF4-FFF2-40B4-BE49-F238E27FC236}">
-                <a16:creationId xmlns:a16="http://schemas.microsoft.com/office/drawing/2014/main" id="{AC4AFB5E-6EA8-8FF1-6CC4-2CAF469A4366}"/>
+                <a16:creationId xmlns:a16="http://schemas.microsoft.com/office/drawing/2014/main" id="{FE4B238B-EC4C-4FA9-3446-C1B116753AF1}"/>
               </a:ext>
             </a:extLst>
           </p:cNvPr>
@@ -3541,7 +3541,7 @@
           <a:bodyPr/>
           <a:lstStyle/>
           <a:p>
-            <a:fld id="{99276E81-FAC9-485E-B9A7-EC3FC9C9DD5D}" type="slidenum">
+            <a:fld id="{E176E3A4-3CBB-4087-8AE5-6CCF17665B68}" type="slidenum">
               <a:rPr kumimoji="1" lang="ja-JP" altLang="en-US" smtClean="0"/>
               <a:t>‹#›</a:t>
             </a:fld>
@@ -3552,7 +3552,7 @@
     </p:spTree>
     <p:extLst>
       <p:ext uri="{BB962C8B-B14F-4D97-AF65-F5344CB8AC3E}">
-        <p14:creationId xmlns:p14="http://schemas.microsoft.com/office/powerpoint/2010/main" val="1730442182"/>
+        <p14:creationId xmlns:p14="http://schemas.microsoft.com/office/powerpoint/2010/main" val="710774889"/>
       </p:ext>
     </p:extLst>
   </p:cSld>
@@ -3584,7 +3584,7 @@
           <p:cNvPr id="2" name="タイトル 1">
             <a:extLst>
               <a:ext uri="{FF2B5EF4-FFF2-40B4-BE49-F238E27FC236}">
-                <a16:creationId xmlns:a16="http://schemas.microsoft.com/office/drawing/2014/main" id="{A7DB8D2B-22C4-34F0-C692-B40588E5F679}"/>
+                <a16:creationId xmlns:a16="http://schemas.microsoft.com/office/drawing/2014/main" id="{3B06F3B2-8617-D2F6-A493-25A1AEDE8712}"/>
               </a:ext>
             </a:extLst>
           </p:cNvPr>
@@ -3621,7 +3621,7 @@
           <p:cNvPr id="3" name="図プレースホルダー 2">
             <a:extLst>
               <a:ext uri="{FF2B5EF4-FFF2-40B4-BE49-F238E27FC236}">
-                <a16:creationId xmlns:a16="http://schemas.microsoft.com/office/drawing/2014/main" id="{89D2573B-02F0-F6D6-CE1C-DF697B98FDFA}"/>
+                <a16:creationId xmlns:a16="http://schemas.microsoft.com/office/drawing/2014/main" id="{BD326376-10AA-3347-DA78-07B222EE5A58}"/>
               </a:ext>
             </a:extLst>
           </p:cNvPr>
@@ -3688,7 +3688,7 @@
           <p:cNvPr id="4" name="テキスト プレースホルダー 3">
             <a:extLst>
               <a:ext uri="{FF2B5EF4-FFF2-40B4-BE49-F238E27FC236}">
-                <a16:creationId xmlns:a16="http://schemas.microsoft.com/office/drawing/2014/main" id="{646E6AB2-81C5-CE6B-D3A9-752CEFD2C052}"/>
+                <a16:creationId xmlns:a16="http://schemas.microsoft.com/office/drawing/2014/main" id="{2A4985CC-2C77-78C6-0125-95205A1B051A}"/>
               </a:ext>
             </a:extLst>
           </p:cNvPr>
@@ -3759,7 +3759,7 @@
           <p:cNvPr id="5" name="日付プレースホルダー 4">
             <a:extLst>
               <a:ext uri="{FF2B5EF4-FFF2-40B4-BE49-F238E27FC236}">
-                <a16:creationId xmlns:a16="http://schemas.microsoft.com/office/drawing/2014/main" id="{B0A55E9F-B86C-BF5B-3AF0-5155FFDA4D8A}"/>
+                <a16:creationId xmlns:a16="http://schemas.microsoft.com/office/drawing/2014/main" id="{21BBB65C-7A88-FF9C-0453-804CFEBBDB59}"/>
               </a:ext>
             </a:extLst>
           </p:cNvPr>
@@ -3775,9 +3775,9 @@
           <a:bodyPr/>
           <a:lstStyle/>
           <a:p>
-            <a:fld id="{B7956192-CA62-4F8B-A14C-F1B97D6B4FED}" type="datetimeFigureOut">
+            <a:fld id="{9F453FE7-A201-44A5-BB2E-86321C77CA51}" type="datetimeFigureOut">
               <a:rPr kumimoji="1" lang="ja-JP" altLang="en-US" smtClean="0"/>
-              <a:t>2026/10/14</a:t>
+              <a:t>2026/10/16</a:t>
             </a:fld>
             <a:endParaRPr kumimoji="1" lang="ja-JP" altLang="en-US"/>
           </a:p>
@@ -3788,7 +3788,7 @@
           <p:cNvPr id="6" name="フッター プレースホルダー 5">
             <a:extLst>
               <a:ext uri="{FF2B5EF4-FFF2-40B4-BE49-F238E27FC236}">
-                <a16:creationId xmlns:a16="http://schemas.microsoft.com/office/drawing/2014/main" id="{D6C50659-FC81-0A9C-764B-EA7E5C512B41}"/>
+                <a16:creationId xmlns:a16="http://schemas.microsoft.com/office/drawing/2014/main" id="{634DD55D-06E7-262A-0A0C-71EA9F9D42A1}"/>
               </a:ext>
             </a:extLst>
           </p:cNvPr>
@@ -3813,7 +3813,7 @@
           <p:cNvPr id="7" name="スライド番号プレースホルダー 6">
             <a:extLst>
               <a:ext uri="{FF2B5EF4-FFF2-40B4-BE49-F238E27FC236}">
-                <a16:creationId xmlns:a16="http://schemas.microsoft.com/office/drawing/2014/main" id="{9ECB60A7-EF0D-7918-86CE-B2EEC51B34F6}"/>
+                <a16:creationId xmlns:a16="http://schemas.microsoft.com/office/drawing/2014/main" id="{53D23C4D-24D7-B55D-8AA6-1FEEB3F318C1}"/>
               </a:ext>
             </a:extLst>
           </p:cNvPr>
@@ -3829,7 +3829,7 @@
           <a:bodyPr/>
           <a:lstStyle/>
           <a:p>
-            <a:fld id="{99276E81-FAC9-485E-B9A7-EC3FC9C9DD5D}" type="slidenum">
+            <a:fld id="{E176E3A4-3CBB-4087-8AE5-6CCF17665B68}" type="slidenum">
               <a:rPr kumimoji="1" lang="ja-JP" altLang="en-US" smtClean="0"/>
               <a:t>‹#›</a:t>
             </a:fld>
@@ -3840,7 +3840,7 @@
     </p:spTree>
     <p:extLst>
       <p:ext uri="{BB962C8B-B14F-4D97-AF65-F5344CB8AC3E}">
-        <p14:creationId xmlns:p14="http://schemas.microsoft.com/office/powerpoint/2010/main" val="2602345647"/>
+        <p14:creationId xmlns:p14="http://schemas.microsoft.com/office/powerpoint/2010/main" val="4132739146"/>
       </p:ext>
     </p:extLst>
   </p:cSld>
@@ -3877,7 +3877,7 @@
           <p:cNvPr id="2" name="タイトル プレースホルダー 1">
             <a:extLst>
               <a:ext uri="{FF2B5EF4-FFF2-40B4-BE49-F238E27FC236}">
-                <a16:creationId xmlns:a16="http://schemas.microsoft.com/office/drawing/2014/main" id="{9C062BDD-AABF-1A5D-CBBC-458BB8697AA1}"/>
+                <a16:creationId xmlns:a16="http://schemas.microsoft.com/office/drawing/2014/main" id="{5D08CED3-0358-A011-118C-89C022BF9A75}"/>
               </a:ext>
             </a:extLst>
           </p:cNvPr>
@@ -3915,7 +3915,7 @@
           <p:cNvPr id="3" name="テキスト プレースホルダー 2">
             <a:extLst>
               <a:ext uri="{FF2B5EF4-FFF2-40B4-BE49-F238E27FC236}">
-                <a16:creationId xmlns:a16="http://schemas.microsoft.com/office/drawing/2014/main" id="{A064DFA6-CD3D-9E38-E9CF-4F8C01DAF7DB}"/>
+                <a16:creationId xmlns:a16="http://schemas.microsoft.com/office/drawing/2014/main" id="{9939BEC5-4AFA-3F84-44D6-ACC92D9D684D}"/>
               </a:ext>
             </a:extLst>
           </p:cNvPr>
@@ -4014,7 +4014,7 @@
           <p:cNvPr id="4" name="日付プレースホルダー 3">
             <a:extLst>
               <a:ext uri="{FF2B5EF4-FFF2-40B4-BE49-F238E27FC236}">
-                <a16:creationId xmlns:a16="http://schemas.microsoft.com/office/drawing/2014/main" id="{192B1730-B072-423F-F56E-DC8FC76A651E}"/>
+                <a16:creationId xmlns:a16="http://schemas.microsoft.com/office/drawing/2014/main" id="{D253B2E8-6EE4-C547-467C-28C74C700CBA}"/>
               </a:ext>
             </a:extLst>
           </p:cNvPr>
@@ -4048,9 +4048,9 @@
             </a:lvl1pPr>
           </a:lstStyle>
           <a:p>
-            <a:fld id="{B7956192-CA62-4F8B-A14C-F1B97D6B4FED}" type="datetimeFigureOut">
+            <a:fld id="{9F453FE7-A201-44A5-BB2E-86321C77CA51}" type="datetimeFigureOut">
               <a:rPr kumimoji="1" lang="ja-JP" altLang="en-US" smtClean="0"/>
-              <a:t>2026/10/14</a:t>
+              <a:t>2026/10/16</a:t>
             </a:fld>
             <a:endParaRPr kumimoji="1" lang="ja-JP" altLang="en-US"/>
           </a:p>
@@ -4061,7 +4061,7 @@
           <p:cNvPr id="5" name="フッター プレースホルダー 4">
             <a:extLst>
               <a:ext uri="{FF2B5EF4-FFF2-40B4-BE49-F238E27FC236}">
-                <a16:creationId xmlns:a16="http://schemas.microsoft.com/office/drawing/2014/main" id="{53713A7B-13F9-FC53-9C91-20653A3D81E0}"/>
+                <a16:creationId xmlns:a16="http://schemas.microsoft.com/office/drawing/2014/main" id="{A2DF559F-C932-1AA9-D9EF-4A029BA906A3}"/>
               </a:ext>
             </a:extLst>
           </p:cNvPr>
@@ -4104,7 +4104,7 @@
           <p:cNvPr id="6" name="スライド番号プレースホルダー 5">
             <a:extLst>
               <a:ext uri="{FF2B5EF4-FFF2-40B4-BE49-F238E27FC236}">
-                <a16:creationId xmlns:a16="http://schemas.microsoft.com/office/drawing/2014/main" id="{30E9B218-1859-EE05-F9AE-16AB03E5D368}"/>
+                <a16:creationId xmlns:a16="http://schemas.microsoft.com/office/drawing/2014/main" id="{2E24F65C-044C-A3B7-03A5-6F8EDCBAC7A4}"/>
               </a:ext>
             </a:extLst>
           </p:cNvPr>
@@ -4138,7 +4138,7 @@
             </a:lvl1pPr>
           </a:lstStyle>
           <a:p>
-            <a:fld id="{99276E81-FAC9-485E-B9A7-EC3FC9C9DD5D}" type="slidenum">
+            <a:fld id="{E176E3A4-3CBB-4087-8AE5-6CCF17665B68}" type="slidenum">
               <a:rPr kumimoji="1" lang="ja-JP" altLang="en-US" smtClean="0"/>
               <a:t>‹#›</a:t>
             </a:fld>
@@ -4149,7 +4149,7 @@
     </p:spTree>
     <p:extLst>
       <p:ext uri="{BB962C8B-B14F-4D97-AF65-F5344CB8AC3E}">
-        <p14:creationId xmlns:p14="http://schemas.microsoft.com/office/powerpoint/2010/main" val="368749134"/>
+        <p14:creationId xmlns:p14="http://schemas.microsoft.com/office/powerpoint/2010/main" val="4077563532"/>
       </p:ext>
     </p:extLst>
   </p:cSld>
@@ -4507,7 +4507,7 @@
         </p:nvSpPr>
         <p:spPr>
           <a:xfrm>
-            <a:off x="495834" y="1144215"/>
+            <a:off x="488543" y="1166079"/>
             <a:ext cx="8968771" cy="1348278"/>
           </a:xfrm>
           <a:prstGeom prst="rect">
@@ -4563,7 +4563,7 @@
         </p:nvSpPr>
         <p:spPr>
           <a:xfrm>
-            <a:off x="495834" y="2988077"/>
+            <a:off x="481251" y="2995365"/>
             <a:ext cx="4739594" cy="364400"/>
           </a:xfrm>
           <a:prstGeom prst="rect">
@@ -4625,8 +4625,8 @@
         </p:nvSpPr>
         <p:spPr>
           <a:xfrm>
-            <a:off x="10390649" y="255080"/>
-            <a:ext cx="1385420" cy="1166079"/>
+            <a:off x="10448983" y="109320"/>
+            <a:ext cx="1604170" cy="1457598"/>
           </a:xfrm>
           <a:prstGeom prst="rect">
             <a:avLst/>
@@ -4744,7 +4744,7 @@
         </p:nvSpPr>
         <p:spPr>
           <a:xfrm>
-            <a:off x="4943762" y="4103139"/>
+            <a:off x="4892720" y="4117715"/>
             <a:ext cx="1859379" cy="437279"/>
           </a:xfrm>
           <a:prstGeom prst="rect">
@@ -4840,7 +4840,7 @@
         </p:nvSpPr>
         <p:spPr>
           <a:xfrm>
-            <a:off x="7371892" y="4103139"/>
+            <a:off x="7335434" y="4110427"/>
             <a:ext cx="1859379" cy="437279"/>
           </a:xfrm>
           <a:prstGeom prst="rect">
@@ -4936,7 +4936,7 @@
         </p:nvSpPr>
         <p:spPr>
           <a:xfrm>
-            <a:off x="9792731" y="4103139"/>
+            <a:off x="9821898" y="4117715"/>
             <a:ext cx="1859379" cy="437279"/>
           </a:xfrm>
           <a:prstGeom prst="rect">
@@ -5085,8 +5085,8 @@
         </p:nvSpPr>
         <p:spPr>
           <a:xfrm>
-            <a:off x="8881271" y="6376993"/>
-            <a:ext cx="2843757" cy="204064"/>
+            <a:off x="291667" y="6559192"/>
+            <a:ext cx="11608361" cy="189488"/>
           </a:xfrm>
           <a:prstGeom prst="rect">
             <a:avLst/>
@@ -5102,9 +5102,9 @@
               <a:buNone/>
             </a:pPr>
             <a:r>
-              <a:rPr lang="en-US" sz="1000" dirty="0">
-                <a:solidFill>
-                  <a:srgbClr val="76716A"/>
+              <a:rPr lang="en-US" sz="1100" dirty="0">
+                <a:solidFill>
+                  <a:srgbClr val="514B44"/>
                 </a:solidFill>
                 <a:latin typeface="Yu Gothic" pitchFamily="34" charset="0"/>
                 <a:ea typeface="Yu Gothic" pitchFamily="34" charset="-122"/>
@@ -5112,14 +5112,14 @@
               </a:rPr>
               <a:t>架空の企画例。実在の開催情報ではありません。</a:t>
             </a:r>
-            <a:endParaRPr lang="en-US" sz="1000" dirty="0"/>
+            <a:endParaRPr lang="en-US" sz="1100" dirty="0"/>
           </a:p>
         </p:txBody>
       </p:sp>
     </p:spTree>
     <p:extLst>
       <p:ext uri="{BB962C8B-B14F-4D97-AF65-F5344CB8AC3E}">
-        <p14:creationId xmlns:p14="http://schemas.microsoft.com/office/powerpoint/2010/main" val="1683833881"/>
+        <p14:creationId xmlns:p14="http://schemas.microsoft.com/office/powerpoint/2010/main" val="1658538056"/>
       </p:ext>
     </p:extLst>
   </p:cSld>
@@ -5162,7 +5162,7 @@
         </p:nvSpPr>
         <p:spPr>
           <a:xfrm>
-            <a:off x="291667" y="349824"/>
+            <a:off x="284376" y="357112"/>
             <a:ext cx="379168" cy="357112"/>
           </a:xfrm>
           <a:prstGeom prst="rect">
@@ -5224,7 +5224,7 @@
         </p:nvSpPr>
         <p:spPr>
           <a:xfrm>
-            <a:off x="1028127" y="196776"/>
+            <a:off x="991669" y="291520"/>
             <a:ext cx="10645858" cy="583039"/>
           </a:xfrm>
           <a:prstGeom prst="rect">
@@ -5263,7 +5263,7 @@
         </p:nvSpPr>
         <p:spPr>
           <a:xfrm>
-            <a:off x="1035419" y="838119"/>
+            <a:off x="1057294" y="816255"/>
             <a:ext cx="10791692" cy="327960"/>
           </a:xfrm>
           <a:prstGeom prst="rect">
@@ -5325,7 +5325,7 @@
         </p:nvSpPr>
         <p:spPr>
           <a:xfrm>
-            <a:off x="284376" y="1552342"/>
+            <a:off x="269792" y="1581494"/>
             <a:ext cx="6562515" cy="357112"/>
           </a:xfrm>
           <a:prstGeom prst="rect">
@@ -5364,7 +5364,7 @@
         </p:nvSpPr>
         <p:spPr>
           <a:xfrm>
-            <a:off x="1050002" y="2186397"/>
+            <a:off x="1115628" y="2215549"/>
             <a:ext cx="2078130" cy="327960"/>
           </a:xfrm>
           <a:prstGeom prst="rect">
@@ -5403,7 +5403,7 @@
         </p:nvSpPr>
         <p:spPr>
           <a:xfrm>
-            <a:off x="5760430" y="2186397"/>
+            <a:off x="5818764" y="2215549"/>
             <a:ext cx="729168" cy="327960"/>
           </a:xfrm>
           <a:prstGeom prst="rect">
@@ -5508,7 +5508,7 @@
         </p:nvSpPr>
         <p:spPr>
           <a:xfrm>
-            <a:off x="729168" y="2776725"/>
+            <a:off x="765627" y="2813165"/>
             <a:ext cx="2019796" cy="364400"/>
           </a:xfrm>
           <a:prstGeom prst="rect">
@@ -5574,7 +5574,7 @@
         </p:nvSpPr>
         <p:spPr>
           <a:xfrm>
-            <a:off x="729168" y="3629420"/>
+            <a:off x="758335" y="3665860"/>
             <a:ext cx="2019796" cy="364400"/>
           </a:xfrm>
           <a:prstGeom prst="rect">
@@ -5640,7 +5640,7 @@
         </p:nvSpPr>
         <p:spPr>
           <a:xfrm>
-            <a:off x="729168" y="4482115"/>
+            <a:off x="758335" y="4511267"/>
             <a:ext cx="2019796" cy="364400"/>
           </a:xfrm>
           <a:prstGeom prst="rect">
@@ -5706,8 +5706,8 @@
         </p:nvSpPr>
         <p:spPr>
           <a:xfrm>
-            <a:off x="4681261" y="3527388"/>
-            <a:ext cx="2909382" cy="553887"/>
+            <a:off x="4739594" y="3520100"/>
+            <a:ext cx="3026049" cy="553887"/>
           </a:xfrm>
           <a:prstGeom prst="rect">
             <a:avLst/>
@@ -5772,7 +5772,7 @@
         </p:nvSpPr>
         <p:spPr>
           <a:xfrm>
-            <a:off x="8983354" y="3439932"/>
+            <a:off x="9041688" y="3425356"/>
             <a:ext cx="2807298" cy="728799"/>
           </a:xfrm>
           <a:prstGeom prst="rect">
@@ -5797,7 +5797,7 @@
                 <a:ea typeface="Yu Gothic" pitchFamily="34" charset="-122"/>
                 <a:cs typeface="Yu Gothic" pitchFamily="34" charset="-120"/>
               </a:rPr>
-              <a:t>各店の詳しい案内への</a:t>
+              <a:t>各店の詳しい案内</a:t>
             </a:r>
             <a:endParaRPr lang="en-US" sz="1900" dirty="0"/>
           </a:p>
@@ -5814,7 +5814,7 @@
                 <a:ea typeface="Yu Gothic" pitchFamily="34" charset="-122"/>
                 <a:cs typeface="Yu Gothic" pitchFamily="34" charset="-120"/>
               </a:rPr>
-              <a:t>リンク</a:t>
+              <a:t>へのリンク</a:t>
             </a:r>
             <a:endParaRPr lang="en-US" sz="1900" dirty="0"/>
           </a:p>
@@ -5924,7 +5924,7 @@
         </p:nvSpPr>
         <p:spPr>
           <a:xfrm>
-            <a:off x="284376" y="5312946"/>
+            <a:off x="284376" y="5298370"/>
             <a:ext cx="3645842" cy="262368"/>
           </a:xfrm>
           <a:prstGeom prst="rect">
@@ -5986,7 +5986,7 @@
         </p:nvSpPr>
         <p:spPr>
           <a:xfrm>
-            <a:off x="291667" y="6063609"/>
+            <a:off x="291667" y="6078185"/>
             <a:ext cx="9406272" cy="451855"/>
           </a:xfrm>
           <a:prstGeom prst="rect">
@@ -6025,8 +6025,8 @@
         </p:nvSpPr>
         <p:spPr>
           <a:xfrm>
-            <a:off x="9829190" y="6376993"/>
-            <a:ext cx="2107297" cy="225928"/>
+            <a:off x="291667" y="6559192"/>
+            <a:ext cx="11608361" cy="189488"/>
           </a:xfrm>
           <a:prstGeom prst="rect">
             <a:avLst/>
@@ -6042,9 +6042,9 @@
               <a:buNone/>
             </a:pPr>
             <a:r>
-              <a:rPr lang="en-US" sz="800" dirty="0">
-                <a:solidFill>
-                  <a:srgbClr val="161616"/>
+              <a:rPr lang="en-US" sz="1100" dirty="0">
+                <a:solidFill>
+                  <a:srgbClr val="514B44"/>
                 </a:solidFill>
                 <a:latin typeface="Yu Gothic" pitchFamily="34" charset="0"/>
                 <a:ea typeface="Yu Gothic" pitchFamily="34" charset="-122"/>
@@ -6052,14 +6052,14 @@
               </a:rPr>
               <a:t>架空の企画例。課題は検証前の仮説です。</a:t>
             </a:r>
-            <a:endParaRPr lang="en-US" sz="800" dirty="0"/>
+            <a:endParaRPr lang="en-US" sz="1100" dirty="0"/>
           </a:p>
         </p:txBody>
       </p:sp>
     </p:spTree>
     <p:extLst>
       <p:ext uri="{BB962C8B-B14F-4D97-AF65-F5344CB8AC3E}">
-        <p14:creationId xmlns:p14="http://schemas.microsoft.com/office/powerpoint/2010/main" val="569791963"/>
+        <p14:creationId xmlns:p14="http://schemas.microsoft.com/office/powerpoint/2010/main" val="3650269366"/>
       </p:ext>
     </p:extLst>
   </p:cSld>
@@ -6102,7 +6102,7 @@
         </p:nvSpPr>
         <p:spPr>
           <a:xfrm>
-            <a:off x="226042" y="247792"/>
+            <a:off x="226042" y="269656"/>
             <a:ext cx="444793" cy="371688"/>
           </a:xfrm>
           <a:prstGeom prst="rect">
@@ -6164,7 +6164,7 @@
         </p:nvSpPr>
         <p:spPr>
           <a:xfrm>
-            <a:off x="1013544" y="167624"/>
+            <a:off x="991669" y="291520"/>
             <a:ext cx="10645858" cy="575751"/>
           </a:xfrm>
           <a:prstGeom prst="rect">
@@ -6203,7 +6203,7 @@
         </p:nvSpPr>
         <p:spPr>
           <a:xfrm>
-            <a:off x="1020836" y="801679"/>
+            <a:off x="984377" y="787103"/>
             <a:ext cx="10791692" cy="393552"/>
           </a:xfrm>
           <a:prstGeom prst="rect">
@@ -6717,7 +6717,7 @@
         </p:nvSpPr>
         <p:spPr>
           <a:xfrm>
-            <a:off x="452084" y="2310293"/>
+            <a:off x="444793" y="2295717"/>
             <a:ext cx="2019796" cy="706935"/>
           </a:xfrm>
           <a:prstGeom prst="rect">
@@ -6734,7 +6734,7 @@
               <a:buNone/>
             </a:pPr>
             <a:r>
-              <a:rPr lang="en-US" sz="1900" dirty="0">
+              <a:rPr lang="en-US" sz="2100" b="1" dirty="0">
                 <a:solidFill>
                   <a:srgbClr val="161616"/>
                 </a:solidFill>
@@ -6744,7 +6744,7 @@
               </a:rPr>
               <a:t>朝のパン市</a:t>
             </a:r>
-            <a:endParaRPr lang="en-US" sz="1900" dirty="0"/>
+            <a:endParaRPr lang="en-US" sz="2100" dirty="0"/>
           </a:p>
         </p:txBody>
       </p:sp>
@@ -6756,7 +6756,7 @@
         </p:nvSpPr>
         <p:spPr>
           <a:xfrm>
-            <a:off x="2814590" y="2310293"/>
+            <a:off x="2894798" y="2295717"/>
             <a:ext cx="1990630" cy="706935"/>
           </a:xfrm>
           <a:prstGeom prst="rect">
@@ -6773,7 +6773,7 @@
               <a:buNone/>
             </a:pPr>
             <a:r>
-              <a:rPr lang="en-US" sz="1900" dirty="0">
+              <a:rPr lang="en-US" sz="2100" b="1" dirty="0">
                 <a:solidFill>
                   <a:srgbClr val="161616"/>
                 </a:solidFill>
@@ -6783,14 +6783,14 @@
               </a:rPr>
               <a:t>11月7日（土）</a:t>
             </a:r>
-            <a:endParaRPr lang="en-US" sz="1900" dirty="0"/>
+            <a:endParaRPr lang="en-US" sz="2100" dirty="0"/>
           </a:p>
           <a:p>
             <a:pPr marL="0" indent="0" algn="l">
               <a:buNone/>
             </a:pPr>
             <a:r>
-              <a:rPr lang="en-US" sz="1900" dirty="0">
+              <a:rPr lang="en-US" sz="2100" b="1" dirty="0">
                 <a:solidFill>
                   <a:srgbClr val="161616"/>
                 </a:solidFill>
@@ -6800,7 +6800,7 @@
               </a:rPr>
               <a:t>10–12時</a:t>
             </a:r>
-            <a:endParaRPr lang="en-US" sz="1900" dirty="0"/>
+            <a:endParaRPr lang="en-US" sz="2100" dirty="0"/>
           </a:p>
         </p:txBody>
       </p:sp>
@@ -6829,7 +6829,7 @@
               <a:buNone/>
             </a:pPr>
             <a:r>
-              <a:rPr lang="en-US" sz="1900" dirty="0">
+              <a:rPr lang="en-US" sz="2100" b="1" dirty="0">
                 <a:solidFill>
                   <a:srgbClr val="161616"/>
                 </a:solidFill>
@@ -6839,7 +6839,7 @@
               </a:rPr>
               <a:t>こもれび広場</a:t>
             </a:r>
-            <a:endParaRPr lang="en-US" sz="1900" dirty="0"/>
+            <a:endParaRPr lang="en-US" sz="2100" dirty="0"/>
           </a:p>
         </p:txBody>
       </p:sp>
@@ -6868,7 +6868,7 @@
               <a:buNone/>
             </a:pPr>
             <a:r>
-              <a:rPr lang="en-US" sz="1900" dirty="0">
+              <a:rPr lang="en-US" sz="2100" b="1" dirty="0">
                 <a:solidFill>
                   <a:srgbClr val="161616"/>
                 </a:solidFill>
@@ -6878,14 +6878,14 @@
               </a:rPr>
               <a:t>入場無料／</a:t>
             </a:r>
-            <a:endParaRPr lang="en-US" sz="1900" dirty="0"/>
+            <a:endParaRPr lang="en-US" sz="2100" dirty="0"/>
           </a:p>
           <a:p>
             <a:pPr marL="0" indent="0" algn="l">
               <a:buNone/>
             </a:pPr>
             <a:r>
-              <a:rPr lang="en-US" sz="1900" dirty="0">
+              <a:rPr lang="en-US" sz="2100" b="1" dirty="0">
                 <a:solidFill>
                   <a:srgbClr val="161616"/>
                 </a:solidFill>
@@ -6895,7 +6895,7 @@
               </a:rPr>
               <a:t>購入は別</a:t>
             </a:r>
-            <a:endParaRPr lang="en-US" sz="1900" dirty="0"/>
+            <a:endParaRPr lang="en-US" sz="2100" dirty="0"/>
           </a:p>
         </p:txBody>
       </p:sp>
@@ -6924,7 +6924,7 @@
               <a:buNone/>
             </a:pPr>
             <a:r>
-              <a:rPr lang="en-US" sz="1900" dirty="0">
+              <a:rPr lang="en-US" sz="2100" b="1" dirty="0">
                 <a:solidFill>
                   <a:srgbClr val="161616"/>
                 </a:solidFill>
@@ -6934,14 +6934,14 @@
               </a:rPr>
               <a:t>小雨実施・</a:t>
             </a:r>
-            <a:endParaRPr lang="en-US" sz="1900" dirty="0"/>
+            <a:endParaRPr lang="en-US" sz="2100" dirty="0"/>
           </a:p>
           <a:p>
             <a:pPr marL="0" indent="0" algn="l">
               <a:buNone/>
             </a:pPr>
             <a:r>
-              <a:rPr lang="en-US" sz="1900" dirty="0">
+              <a:rPr lang="en-US" sz="2100" b="1" dirty="0">
                 <a:solidFill>
                   <a:srgbClr val="161616"/>
                 </a:solidFill>
@@ -6951,7 +6951,7 @@
               </a:rPr>
               <a:t>荒天中止</a:t>
             </a:r>
-            <a:endParaRPr lang="en-US" sz="1900" dirty="0"/>
+            <a:endParaRPr lang="en-US" sz="2100" dirty="0"/>
           </a:p>
         </p:txBody>
       </p:sp>
@@ -6963,7 +6963,7 @@
         </p:nvSpPr>
         <p:spPr>
           <a:xfrm>
-            <a:off x="452084" y="3308748"/>
+            <a:off x="444793" y="3316036"/>
             <a:ext cx="2019796" cy="736087"/>
           </a:xfrm>
           <a:prstGeom prst="rect">
@@ -6980,7 +6980,7 @@
               <a:buNone/>
             </a:pPr>
             <a:r>
-              <a:rPr lang="en-US" sz="1900" dirty="0">
+              <a:rPr lang="en-US" sz="2100" b="1" dirty="0">
                 <a:solidFill>
                   <a:srgbClr val="161616"/>
                 </a:solidFill>
@@ -6990,7 +6990,7 @@
               </a:rPr>
               <a:t>路地の音楽会</a:t>
             </a:r>
-            <a:endParaRPr lang="en-US" sz="1900" dirty="0"/>
+            <a:endParaRPr lang="en-US" sz="2100" dirty="0"/>
           </a:p>
         </p:txBody>
       </p:sp>
@@ -7002,8 +7002,8 @@
         </p:nvSpPr>
         <p:spPr>
           <a:xfrm>
-            <a:off x="2814590" y="3308748"/>
-            <a:ext cx="1990630" cy="736087"/>
+            <a:off x="2851048" y="3301460"/>
+            <a:ext cx="2078130" cy="736087"/>
           </a:xfrm>
           <a:prstGeom prst="rect">
             <a:avLst/>
@@ -7019,7 +7019,7 @@
               <a:buNone/>
             </a:pPr>
             <a:r>
-              <a:rPr lang="en-US" sz="1900" dirty="0">
+              <a:rPr lang="en-US" sz="2100" b="1" dirty="0">
                 <a:solidFill>
                   <a:srgbClr val="161616"/>
                 </a:solidFill>
@@ -7029,14 +7029,14 @@
               </a:rPr>
               <a:t>11月14日（土）</a:t>
             </a:r>
-            <a:endParaRPr lang="en-US" sz="1900" dirty="0"/>
+            <a:endParaRPr lang="en-US" sz="2100" dirty="0"/>
           </a:p>
           <a:p>
             <a:pPr marL="0" indent="0" algn="l">
               <a:buNone/>
             </a:pPr>
             <a:r>
-              <a:rPr lang="en-US" sz="1900" dirty="0">
+              <a:rPr lang="en-US" sz="2100" b="1" dirty="0">
                 <a:solidFill>
                   <a:srgbClr val="161616"/>
                 </a:solidFill>
@@ -7046,7 +7046,7 @@
               </a:rPr>
               <a:t>14–16時</a:t>
             </a:r>
-            <a:endParaRPr lang="en-US" sz="1900" dirty="0"/>
+            <a:endParaRPr lang="en-US" sz="2100" dirty="0"/>
           </a:p>
         </p:txBody>
       </p:sp>
@@ -7058,7 +7058,7 @@
         </p:nvSpPr>
         <p:spPr>
           <a:xfrm>
-            <a:off x="5147929" y="3308748"/>
+            <a:off x="5257304" y="3330612"/>
             <a:ext cx="2041671" cy="736087"/>
           </a:xfrm>
           <a:prstGeom prst="rect">
@@ -7075,7 +7075,7 @@
               <a:buNone/>
             </a:pPr>
             <a:r>
-              <a:rPr lang="en-US" sz="1900" dirty="0">
+              <a:rPr lang="en-US" sz="2100" b="1" dirty="0">
                 <a:solidFill>
                   <a:srgbClr val="161616"/>
                 </a:solidFill>
@@ -7085,7 +7085,7 @@
               </a:rPr>
               <a:t>ふれあい会館</a:t>
             </a:r>
-            <a:endParaRPr lang="en-US" sz="1900" dirty="0"/>
+            <a:endParaRPr lang="en-US" sz="2100" dirty="0"/>
           </a:p>
         </p:txBody>
       </p:sp>
@@ -7114,7 +7114,7 @@
               <a:buNone/>
             </a:pPr>
             <a:r>
-              <a:rPr lang="en-US" sz="1900" dirty="0">
+              <a:rPr lang="en-US" sz="2100" b="1" dirty="0">
                 <a:solidFill>
                   <a:srgbClr val="161616"/>
                 </a:solidFill>
@@ -7124,7 +7124,7 @@
               </a:rPr>
               <a:t>入場無料</a:t>
             </a:r>
-            <a:endParaRPr lang="en-US" sz="1900" dirty="0"/>
+            <a:endParaRPr lang="en-US" sz="2100" dirty="0"/>
           </a:p>
         </p:txBody>
       </p:sp>
@@ -7153,7 +7153,7 @@
               <a:buNone/>
             </a:pPr>
             <a:r>
-              <a:rPr lang="en-US" sz="1900" dirty="0">
+              <a:rPr lang="en-US" sz="2100" b="1" dirty="0">
                 <a:solidFill>
                   <a:srgbClr val="161616"/>
                 </a:solidFill>
@@ -7163,7 +7163,7 @@
               </a:rPr>
               <a:t>屋内開催</a:t>
             </a:r>
-            <a:endParaRPr lang="en-US" sz="1900" dirty="0"/>
+            <a:endParaRPr lang="en-US" sz="2100" dirty="0"/>
           </a:p>
         </p:txBody>
       </p:sp>
@@ -7175,7 +7175,7 @@
         </p:nvSpPr>
         <p:spPr>
           <a:xfrm>
-            <a:off x="452084" y="4336355"/>
+            <a:off x="437501" y="4336355"/>
             <a:ext cx="2019796" cy="721511"/>
           </a:xfrm>
           <a:prstGeom prst="rect">
@@ -7192,7 +7192,7 @@
               <a:buNone/>
             </a:pPr>
             <a:r>
-              <a:rPr lang="en-US" sz="1900" dirty="0">
+              <a:rPr lang="en-US" sz="2100" b="1" dirty="0">
                 <a:solidFill>
                   <a:srgbClr val="161616"/>
                 </a:solidFill>
@@ -7202,7 +7202,7 @@
               </a:rPr>
               <a:t>夕暮れ古本交換</a:t>
             </a:r>
-            <a:endParaRPr lang="en-US" sz="1900" dirty="0"/>
+            <a:endParaRPr lang="en-US" sz="2100" dirty="0"/>
           </a:p>
         </p:txBody>
       </p:sp>
@@ -7214,8 +7214,8 @@
         </p:nvSpPr>
         <p:spPr>
           <a:xfrm>
-            <a:off x="2814590" y="4336355"/>
-            <a:ext cx="1990630" cy="721511"/>
+            <a:off x="2851048" y="4329067"/>
+            <a:ext cx="2078130" cy="721511"/>
           </a:xfrm>
           <a:prstGeom prst="rect">
             <a:avLst/>
@@ -7231,7 +7231,7 @@
               <a:buNone/>
             </a:pPr>
             <a:r>
-              <a:rPr lang="en-US" sz="1900" dirty="0">
+              <a:rPr lang="en-US" sz="2100" b="1" dirty="0">
                 <a:solidFill>
                   <a:srgbClr val="161616"/>
                 </a:solidFill>
@@ -7241,14 +7241,14 @@
               </a:rPr>
               <a:t>11月21日（土）</a:t>
             </a:r>
-            <a:endParaRPr lang="en-US" sz="1900" dirty="0"/>
+            <a:endParaRPr lang="en-US" sz="2100" dirty="0"/>
           </a:p>
           <a:p>
             <a:pPr marL="0" indent="0" algn="l">
               <a:buNone/>
             </a:pPr>
             <a:r>
-              <a:rPr lang="en-US" sz="1900" dirty="0">
+              <a:rPr lang="en-US" sz="2100" b="1" dirty="0">
                 <a:solidFill>
                   <a:srgbClr val="161616"/>
                 </a:solidFill>
@@ -7258,7 +7258,7 @@
               </a:rPr>
               <a:t>16–18時</a:t>
             </a:r>
-            <a:endParaRPr lang="en-US" sz="1900" dirty="0"/>
+            <a:endParaRPr lang="en-US" sz="2100" dirty="0"/>
           </a:p>
         </p:txBody>
       </p:sp>
@@ -7270,7 +7270,7 @@
         </p:nvSpPr>
         <p:spPr>
           <a:xfrm>
-            <a:off x="5147929" y="4336355"/>
+            <a:off x="5250012" y="4358219"/>
             <a:ext cx="2041671" cy="721511"/>
           </a:xfrm>
           <a:prstGeom prst="rect">
@@ -7287,7 +7287,7 @@
               <a:buNone/>
             </a:pPr>
             <a:r>
-              <a:rPr lang="en-US" sz="1900" dirty="0">
+              <a:rPr lang="en-US" sz="2100" b="1" dirty="0">
                 <a:solidFill>
                   <a:srgbClr val="161616"/>
                 </a:solidFill>
@@ -7297,7 +7297,7 @@
               </a:rPr>
               <a:t>駅前アーケード</a:t>
             </a:r>
-            <a:endParaRPr lang="en-US" sz="1900" dirty="0"/>
+            <a:endParaRPr lang="en-US" sz="2100" dirty="0"/>
           </a:p>
         </p:txBody>
       </p:sp>
@@ -7326,7 +7326,7 @@
               <a:buNone/>
             </a:pPr>
             <a:r>
-              <a:rPr lang="en-US" sz="1900" dirty="0">
+              <a:rPr lang="en-US" sz="2100" b="1" dirty="0">
                 <a:solidFill>
                   <a:srgbClr val="161616"/>
                 </a:solidFill>
@@ -7336,7 +7336,7 @@
               </a:rPr>
               <a:t>参加無料</a:t>
             </a:r>
-            <a:endParaRPr lang="en-US" sz="1900" dirty="0"/>
+            <a:endParaRPr lang="en-US" sz="2100" dirty="0"/>
           </a:p>
         </p:txBody>
       </p:sp>
@@ -7365,7 +7365,7 @@
               <a:buNone/>
             </a:pPr>
             <a:r>
-              <a:rPr lang="en-US" sz="1900" dirty="0">
+              <a:rPr lang="en-US" sz="2100" b="1" dirty="0">
                 <a:solidFill>
                   <a:srgbClr val="161616"/>
                 </a:solidFill>
@@ -7375,7 +7375,7 @@
               </a:rPr>
               <a:t>屋根下で実施</a:t>
             </a:r>
-            <a:endParaRPr lang="en-US" sz="1900" dirty="0"/>
+            <a:endParaRPr lang="en-US" sz="2100" dirty="0"/>
           </a:p>
         </p:txBody>
       </p:sp>
@@ -7465,7 +7465,7 @@
         </p:nvSpPr>
         <p:spPr>
           <a:xfrm>
-            <a:off x="255209" y="6187505"/>
+            <a:off x="255209" y="6041745"/>
             <a:ext cx="11695861" cy="3644"/>
           </a:xfrm>
           <a:prstGeom prst="line">
@@ -7488,8 +7488,8 @@
         </p:nvSpPr>
         <p:spPr>
           <a:xfrm>
-            <a:off x="255209" y="6289537"/>
-            <a:ext cx="8677104" cy="393552"/>
+            <a:off x="240626" y="6121913"/>
+            <a:ext cx="11302110" cy="393552"/>
           </a:xfrm>
           <a:prstGeom prst="rect">
             <a:avLst/>
@@ -7527,8 +7527,8 @@
         </p:nvSpPr>
         <p:spPr>
           <a:xfrm>
-            <a:off x="9318772" y="6457160"/>
-            <a:ext cx="2661465" cy="233216"/>
+            <a:off x="291667" y="6559192"/>
+            <a:ext cx="11608361" cy="189488"/>
           </a:xfrm>
           <a:prstGeom prst="rect">
             <a:avLst/>
@@ -7544,9 +7544,9 @@
               <a:buNone/>
             </a:pPr>
             <a:r>
-              <a:rPr lang="en-US" sz="1000" dirty="0">
-                <a:solidFill>
-                  <a:srgbClr val="161616"/>
+              <a:rPr lang="en-US" sz="1100" dirty="0">
+                <a:solidFill>
+                  <a:srgbClr val="514B44"/>
                 </a:solidFill>
                 <a:latin typeface="Yu Gothic" pitchFamily="34" charset="0"/>
                 <a:ea typeface="Yu Gothic" pitchFamily="34" charset="-122"/>
@@ -7554,14 +7554,14 @@
               </a:rPr>
               <a:t>架空の企画例。開催情報はすべて例示。</a:t>
             </a:r>
-            <a:endParaRPr lang="en-US" sz="1000" dirty="0"/>
+            <a:endParaRPr lang="en-US" sz="1100" dirty="0"/>
           </a:p>
         </p:txBody>
       </p:sp>
     </p:spTree>
     <p:extLst>
       <p:ext uri="{BB962C8B-B14F-4D97-AF65-F5344CB8AC3E}">
-        <p14:creationId xmlns:p14="http://schemas.microsoft.com/office/powerpoint/2010/main" val="833215559"/>
+        <p14:creationId xmlns:p14="http://schemas.microsoft.com/office/powerpoint/2010/main" val="2748172669"/>
       </p:ext>
     </p:extLst>
   </p:cSld>
@@ -7604,7 +7604,7 @@
         </p:nvSpPr>
         <p:spPr>
           <a:xfrm>
-            <a:off x="357293" y="138472"/>
+            <a:off x="350001" y="145760"/>
             <a:ext cx="444793" cy="364400"/>
           </a:xfrm>
           <a:prstGeom prst="rect">
@@ -7666,7 +7666,7 @@
         </p:nvSpPr>
         <p:spPr>
           <a:xfrm>
-            <a:off x="357293" y="590327"/>
+            <a:off x="350001" y="583039"/>
             <a:ext cx="11484402" cy="612191"/>
           </a:xfrm>
           <a:prstGeom prst="rect">
@@ -7705,7 +7705,7 @@
         </p:nvSpPr>
         <p:spPr>
           <a:xfrm>
-            <a:off x="357293" y="1268111"/>
+            <a:off x="364584" y="1253535"/>
             <a:ext cx="11302110" cy="371688"/>
           </a:xfrm>
           <a:prstGeom prst="rect">
@@ -8095,7 +8095,7 @@
         </p:nvSpPr>
         <p:spPr>
           <a:xfrm>
-            <a:off x="1378128" y="2543509"/>
+            <a:off x="1400003" y="2528933"/>
             <a:ext cx="2048963" cy="714223"/>
           </a:xfrm>
           <a:prstGeom prst="rect">
@@ -8134,7 +8134,7 @@
         </p:nvSpPr>
         <p:spPr>
           <a:xfrm>
-            <a:off x="3864592" y="2543509"/>
+            <a:off x="3915634" y="2550797"/>
             <a:ext cx="3500008" cy="714223"/>
           </a:xfrm>
           <a:prstGeom prst="rect">
@@ -8151,7 +8151,7 @@
               <a:buNone/>
             </a:pPr>
             <a:r>
-              <a:rPr lang="en-US" sz="2000" dirty="0">
+              <a:rPr lang="en-US" sz="2000" b="1" dirty="0">
                 <a:solidFill>
                   <a:srgbClr val="161616"/>
                 </a:solidFill>
@@ -8173,7 +8173,7 @@
         </p:nvSpPr>
         <p:spPr>
           <a:xfrm>
-            <a:off x="7802102" y="2543509"/>
+            <a:off x="7845852" y="2550797"/>
             <a:ext cx="3886467" cy="714223"/>
           </a:xfrm>
           <a:prstGeom prst="rect">
@@ -8190,7 +8190,7 @@
               <a:buNone/>
             </a:pPr>
             <a:r>
-              <a:rPr lang="en-US" sz="2000" dirty="0">
+              <a:rPr lang="en-US" sz="2000" b="1" dirty="0">
                 <a:solidFill>
                   <a:srgbClr val="161616"/>
                 </a:solidFill>
@@ -8302,7 +8302,7 @@
         </p:nvSpPr>
         <p:spPr>
           <a:xfrm>
-            <a:off x="1378128" y="3549252"/>
+            <a:off x="1400003" y="3549252"/>
             <a:ext cx="2048963" cy="714223"/>
           </a:xfrm>
           <a:prstGeom prst="rect">
@@ -8341,7 +8341,7 @@
         </p:nvSpPr>
         <p:spPr>
           <a:xfrm>
-            <a:off x="3864592" y="3549252"/>
+            <a:off x="3915634" y="3563828"/>
             <a:ext cx="3500008" cy="714223"/>
           </a:xfrm>
           <a:prstGeom prst="rect">
@@ -8358,7 +8358,7 @@
               <a:buNone/>
             </a:pPr>
             <a:r>
-              <a:rPr lang="en-US" sz="2000" dirty="0">
+              <a:rPr lang="en-US" sz="2000" b="1" dirty="0">
                 <a:solidFill>
                   <a:srgbClr val="161616"/>
                 </a:solidFill>
@@ -8380,7 +8380,7 @@
         </p:nvSpPr>
         <p:spPr>
           <a:xfrm>
-            <a:off x="7802102" y="3549252"/>
+            <a:off x="7853143" y="3556540"/>
             <a:ext cx="3886467" cy="714223"/>
           </a:xfrm>
           <a:prstGeom prst="rect">
@@ -8397,7 +8397,7 @@
               <a:buNone/>
             </a:pPr>
             <a:r>
-              <a:rPr lang="en-US" sz="2000" dirty="0">
+              <a:rPr lang="en-US" sz="2000" b="1" dirty="0">
                 <a:solidFill>
                   <a:srgbClr val="161616"/>
                 </a:solidFill>
@@ -8509,7 +8509,7 @@
         </p:nvSpPr>
         <p:spPr>
           <a:xfrm>
-            <a:off x="1378128" y="4554995"/>
+            <a:off x="1400003" y="4562283"/>
             <a:ext cx="2048963" cy="736087"/>
           </a:xfrm>
           <a:prstGeom prst="rect">
@@ -8548,7 +8548,7 @@
         </p:nvSpPr>
         <p:spPr>
           <a:xfrm>
-            <a:off x="3864592" y="4554995"/>
+            <a:off x="3915634" y="4576859"/>
             <a:ext cx="3500008" cy="736087"/>
           </a:xfrm>
           <a:prstGeom prst="rect">
@@ -8565,7 +8565,7 @@
               <a:buNone/>
             </a:pPr>
             <a:r>
-              <a:rPr lang="en-US" sz="2000" dirty="0">
+              <a:rPr lang="en-US" sz="2000" b="1" dirty="0">
                 <a:solidFill>
                   <a:srgbClr val="161616"/>
                 </a:solidFill>
@@ -8587,7 +8587,7 @@
         </p:nvSpPr>
         <p:spPr>
           <a:xfrm>
-            <a:off x="7802102" y="4554995"/>
+            <a:off x="7853143" y="4576859"/>
             <a:ext cx="3886467" cy="736087"/>
           </a:xfrm>
           <a:prstGeom prst="rect">
@@ -8604,7 +8604,7 @@
               <a:buNone/>
             </a:pPr>
             <a:r>
-              <a:rPr lang="en-US" sz="2000" dirty="0">
+              <a:rPr lang="en-US" sz="2000" b="1" dirty="0">
                 <a:solidFill>
                   <a:srgbClr val="161616"/>
                 </a:solidFill>
@@ -8793,8 +8793,8 @@
         </p:nvSpPr>
         <p:spPr>
           <a:xfrm>
-            <a:off x="9391689" y="6515464"/>
-            <a:ext cx="2471881" cy="196776"/>
+            <a:off x="291667" y="6559192"/>
+            <a:ext cx="11608361" cy="189488"/>
           </a:xfrm>
           <a:prstGeom prst="rect">
             <a:avLst/>
@@ -8810,9 +8810,9 @@
               <a:buNone/>
             </a:pPr>
             <a:r>
-              <a:rPr lang="en-US" sz="800" dirty="0">
-                <a:solidFill>
-                  <a:srgbClr val="161616"/>
+              <a:rPr lang="en-US" sz="1100" dirty="0">
+                <a:solidFill>
+                  <a:srgbClr val="514B44"/>
                 </a:solidFill>
                 <a:latin typeface="Yu Gothic" pitchFamily="34" charset="0"/>
                 <a:ea typeface="Yu Gothic" pitchFamily="34" charset="-122"/>
@@ -8820,14 +8820,14 @@
               </a:rPr>
               <a:t>架空の企画例。担当体制は提案であり未合意。</a:t>
             </a:r>
-            <a:endParaRPr lang="en-US" sz="800" dirty="0"/>
+            <a:endParaRPr lang="en-US" sz="1100" dirty="0"/>
           </a:p>
         </p:txBody>
       </p:sp>
     </p:spTree>
     <p:extLst>
       <p:ext uri="{BB962C8B-B14F-4D97-AF65-F5344CB8AC3E}">
-        <p14:creationId xmlns:p14="http://schemas.microsoft.com/office/powerpoint/2010/main" val="278566385"/>
+        <p14:creationId xmlns:p14="http://schemas.microsoft.com/office/powerpoint/2010/main" val="1762957542"/>
       </p:ext>
     </p:extLst>
   </p:cSld>
@@ -8897,8 +8897,8 @@
         </p:nvSpPr>
         <p:spPr>
           <a:xfrm>
-            <a:off x="466668" y="451855"/>
-            <a:ext cx="597918" cy="481007"/>
+            <a:off x="466668" y="422704"/>
+            <a:ext cx="597918" cy="539311"/>
           </a:xfrm>
           <a:prstGeom prst="rect">
             <a:avLst/>
@@ -8936,7 +8936,7 @@
         </p:nvSpPr>
         <p:spPr>
           <a:xfrm>
-            <a:off x="1414587" y="364400"/>
+            <a:off x="1421878" y="342536"/>
             <a:ext cx="10390649" cy="685071"/>
           </a:xfrm>
           <a:prstGeom prst="rect">
@@ -8975,7 +8975,7 @@
         </p:nvSpPr>
         <p:spPr>
           <a:xfrm>
-            <a:off x="1436462" y="1144215"/>
+            <a:off x="1458337" y="1107775"/>
             <a:ext cx="10354191" cy="386264"/>
           </a:xfrm>
           <a:prstGeom prst="rect">
@@ -9365,7 +9365,7 @@
         </p:nvSpPr>
         <p:spPr>
           <a:xfrm>
-            <a:off x="663543" y="2514357"/>
+            <a:off x="670835" y="2499781"/>
             <a:ext cx="2872923" cy="604903"/>
           </a:xfrm>
           <a:prstGeom prst="rect">
@@ -9404,7 +9404,7 @@
         </p:nvSpPr>
         <p:spPr>
           <a:xfrm>
-            <a:off x="3973968" y="2514357"/>
+            <a:off x="3966676" y="2521645"/>
             <a:ext cx="3704175" cy="604903"/>
           </a:xfrm>
           <a:prstGeom prst="rect">
@@ -9421,7 +9421,7 @@
               <a:buNone/>
             </a:pPr>
             <a:r>
-              <a:rPr lang="en-US" sz="2000" dirty="0">
+              <a:rPr lang="en-US" sz="2000" b="1" dirty="0">
                 <a:solidFill>
                   <a:srgbClr val="161616"/>
                 </a:solidFill>
@@ -9429,7 +9429,7 @@
                 <a:ea typeface="Yu Gothic" pitchFamily="34" charset="-122"/>
                 <a:cs typeface="Yu Gothic" pitchFamily="34" charset="-120"/>
               </a:rPr>
-              <a:t>来訪者に目的の案内を探して</a:t>
+              <a:t>来訪者に目的の案内を</a:t>
             </a:r>
             <a:endParaRPr lang="en-US" sz="2000" dirty="0"/>
           </a:p>
@@ -9438,7 +9438,7 @@
               <a:buNone/>
             </a:pPr>
             <a:r>
-              <a:rPr lang="en-US" sz="2000" dirty="0">
+              <a:rPr lang="en-US" sz="2000" b="1" dirty="0">
                 <a:solidFill>
                   <a:srgbClr val="161616"/>
                 </a:solidFill>
@@ -9446,7 +9446,7 @@
                 <a:ea typeface="Yu Gothic" pitchFamily="34" charset="-122"/>
                 <a:cs typeface="Yu Gothic" pitchFamily="34" charset="-120"/>
               </a:rPr>
-              <a:t>もらう</a:t>
+              <a:t>探してもらう</a:t>
             </a:r>
             <a:endParaRPr lang="en-US" sz="2000" dirty="0"/>
           </a:p>
@@ -9460,7 +9460,7 @@
         </p:nvSpPr>
         <p:spPr>
           <a:xfrm>
-            <a:off x="8115644" y="2514357"/>
+            <a:off x="8101061" y="2528933"/>
             <a:ext cx="3551050" cy="604903"/>
           </a:xfrm>
           <a:prstGeom prst="rect">
@@ -9477,7 +9477,7 @@
               <a:buNone/>
             </a:pPr>
             <a:r>
-              <a:rPr lang="en-US" sz="2000" dirty="0">
+              <a:rPr lang="en-US" sz="2000" b="1" dirty="0">
                 <a:solidFill>
                   <a:srgbClr val="161616"/>
                 </a:solidFill>
@@ -9499,7 +9499,7 @@
         </p:nvSpPr>
         <p:spPr>
           <a:xfrm>
-            <a:off x="663543" y="3410780"/>
+            <a:off x="670835" y="3410780"/>
             <a:ext cx="2872923" cy="466431"/>
           </a:xfrm>
           <a:prstGeom prst="rect">
@@ -9538,7 +9538,7 @@
         </p:nvSpPr>
         <p:spPr>
           <a:xfrm>
-            <a:off x="3973968" y="3410780"/>
+            <a:off x="3966676" y="3432644"/>
             <a:ext cx="3704175" cy="466431"/>
           </a:xfrm>
           <a:prstGeom prst="rect">
@@ -9555,7 +9555,7 @@
               <a:buNone/>
             </a:pPr>
             <a:r>
-              <a:rPr lang="en-US" sz="2000" dirty="0">
+              <a:rPr lang="en-US" sz="2000" b="1" dirty="0">
                 <a:solidFill>
                   <a:srgbClr val="161616"/>
                 </a:solidFill>
@@ -9577,7 +9577,7 @@
         </p:nvSpPr>
         <p:spPr>
           <a:xfrm>
-            <a:off x="8115644" y="3410780"/>
+            <a:off x="8101061" y="3432644"/>
             <a:ext cx="3551050" cy="466431"/>
           </a:xfrm>
           <a:prstGeom prst="rect">
@@ -9594,7 +9594,7 @@
               <a:buNone/>
             </a:pPr>
             <a:r>
-              <a:rPr lang="en-US" sz="2000" dirty="0">
+              <a:rPr lang="en-US" sz="2000" b="1" dirty="0">
                 <a:solidFill>
                   <a:srgbClr val="161616"/>
                 </a:solidFill>
@@ -9616,7 +9616,7 @@
         </p:nvSpPr>
         <p:spPr>
           <a:xfrm>
-            <a:off x="663543" y="4168731"/>
+            <a:off x="670835" y="4161443"/>
             <a:ext cx="2872923" cy="466431"/>
           </a:xfrm>
           <a:prstGeom prst="rect">
@@ -9655,7 +9655,7 @@
         </p:nvSpPr>
         <p:spPr>
           <a:xfrm>
-            <a:off x="3973968" y="4168731"/>
+            <a:off x="3973968" y="4190595"/>
             <a:ext cx="3704175" cy="466431"/>
           </a:xfrm>
           <a:prstGeom prst="rect">
@@ -9672,7 +9672,7 @@
               <a:buNone/>
             </a:pPr>
             <a:r>
-              <a:rPr lang="en-US" sz="2000" dirty="0">
+              <a:rPr lang="en-US" sz="2000" b="1" dirty="0">
                 <a:solidFill>
                   <a:srgbClr val="161616"/>
                 </a:solidFill>
@@ -9694,8 +9694,8 @@
         </p:nvSpPr>
         <p:spPr>
           <a:xfrm>
-            <a:off x="8115644" y="4168731"/>
-            <a:ext cx="3551050" cy="466431"/>
+            <a:off x="7969810" y="4168731"/>
+            <a:ext cx="3806259" cy="466431"/>
           </a:xfrm>
           <a:prstGeom prst="rect">
             <a:avLst/>
@@ -9711,7 +9711,7 @@
               <a:buNone/>
             </a:pPr>
             <a:r>
-              <a:rPr lang="en-US" sz="2000" dirty="0">
+              <a:rPr lang="en-US" sz="2000" b="1" dirty="0">
                 <a:solidFill>
                   <a:srgbClr val="161616"/>
                 </a:solidFill>
@@ -9719,27 +9719,10 @@
                 <a:ea typeface="Yu Gothic" pitchFamily="34" charset="-122"/>
                 <a:cs typeface="Yu Gothic" pitchFamily="34" charset="-120"/>
               </a:rPr>
-              <a:t>文字の読みやすさ・</a:t>
+              <a:t>文字の読みやすさ・問い合わせ</a:t>
             </a:r>
             <a:endParaRPr lang="en-US" sz="2000" dirty="0"/>
           </a:p>
-          <a:p>
-            <a:pPr marL="0" indent="0" algn="l">
-              <a:buNone/>
-            </a:pPr>
-            <a:r>
-              <a:rPr lang="en-US" sz="2000" dirty="0">
-                <a:solidFill>
-                  <a:srgbClr val="161616"/>
-                </a:solidFill>
-                <a:latin typeface="Yu Gothic" pitchFamily="34" charset="0"/>
-                <a:ea typeface="Yu Gothic" pitchFamily="34" charset="-122"/>
-                <a:cs typeface="Yu Gothic" pitchFamily="34" charset="-120"/>
-              </a:rPr>
-              <a:t>問い合わせ</a:t>
-            </a:r>
-            <a:endParaRPr lang="en-US" sz="2000" dirty="0"/>
-          </a:p>
         </p:txBody>
       </p:sp>
       <p:sp>
@@ -9750,7 +9733,7 @@
         </p:nvSpPr>
         <p:spPr>
           <a:xfrm>
-            <a:off x="364584" y="4977698"/>
+            <a:off x="364584" y="4984986"/>
             <a:ext cx="11302110" cy="357112"/>
           </a:xfrm>
           <a:prstGeom prst="rect">
@@ -9851,7 +9834,7 @@
         </p:nvSpPr>
         <p:spPr>
           <a:xfrm>
-            <a:off x="371876" y="6041745"/>
+            <a:off x="371876" y="6034457"/>
             <a:ext cx="9114605" cy="546599"/>
           </a:xfrm>
           <a:prstGeom prst="rect">
@@ -9890,8 +9873,8 @@
         </p:nvSpPr>
         <p:spPr>
           <a:xfrm>
-            <a:off x="9479189" y="6376993"/>
-            <a:ext cx="2406256" cy="211352"/>
+            <a:off x="291667" y="6559192"/>
+            <a:ext cx="11608361" cy="189488"/>
           </a:xfrm>
           <a:prstGeom prst="rect">
             <a:avLst/>
@@ -9907,9 +9890,9 @@
               <a:buNone/>
             </a:pPr>
             <a:r>
-              <a:rPr lang="en-US" sz="900" dirty="0">
-                <a:solidFill>
-                  <a:srgbClr val="161616"/>
+              <a:rPr lang="en-US" sz="1100" dirty="0">
+                <a:solidFill>
+                  <a:srgbClr val="514B44"/>
                 </a:solidFill>
                 <a:latin typeface="Yu Gothic" pitchFamily="34" charset="0"/>
                 <a:ea typeface="Yu Gothic" pitchFamily="34" charset="-122"/>
@@ -9917,14 +9900,14 @@
               </a:rPr>
               <a:t>架空の企画例。試行は提案であり未実施。</a:t>
             </a:r>
-            <a:endParaRPr lang="en-US" sz="900" dirty="0"/>
+            <a:endParaRPr lang="en-US" sz="1100" dirty="0"/>
           </a:p>
         </p:txBody>
       </p:sp>
     </p:spTree>
     <p:extLst>
       <p:ext uri="{BB962C8B-B14F-4D97-AF65-F5344CB8AC3E}">
-        <p14:creationId xmlns:p14="http://schemas.microsoft.com/office/powerpoint/2010/main" val="4254899147"/>
+        <p14:creationId xmlns:p14="http://schemas.microsoft.com/office/powerpoint/2010/main" val="1340710094"/>
       </p:ext>
     </p:extLst>
   </p:cSld>
